--- a/Self-built_nitride_MBE_proposal.pptx
+++ b/Self-built_nitride_MBE_proposal.pptx
@@ -5,18 +5,17 @@
     <p:sldMasterId id="2147483672" r:id="rId4"/>
   </p:sldMasterIdLst>
   <p:notesMasterIdLst>
-    <p:notesMasterId r:id="rId11"/>
+    <p:notesMasterId r:id="rId10"/>
   </p:notesMasterIdLst>
   <p:handoutMasterIdLst>
-    <p:handoutMasterId r:id="rId12"/>
+    <p:handoutMasterId r:id="rId11"/>
   </p:handoutMasterIdLst>
   <p:sldIdLst>
     <p:sldId id="263" r:id="rId5"/>
     <p:sldId id="257" r:id="rId6"/>
     <p:sldId id="256" r:id="rId7"/>
     <p:sldId id="258" r:id="rId8"/>
-    <p:sldId id="260" r:id="rId9"/>
-    <p:sldId id="259" r:id="rId10"/>
+    <p:sldId id="259" r:id="rId9"/>
   </p:sldIdLst>
   <p:sldSz cx="9144000" cy="5143500" type="screen16x9"/>
   <p:notesSz cx="6858000" cy="9144000"/>
@@ -124,7 +123,6 @@
             <p14:sldId id="257"/>
             <p14:sldId id="256"/>
             <p14:sldId id="258"/>
-            <p14:sldId id="260"/>
             <p14:sldId id="259"/>
           </p14:sldIdLst>
         </p14:section>
@@ -430,7 +428,7 @@
           <a:p>
             <a:fld id="{34DD02CC-F990-1844-B591-EC84015C737C}" type="datetimeFigureOut">
               <a:rPr kumimoji="1" lang="zh-HK" altLang="en-US" smtClean="0"/>
-              <a:t>27/7/2026</a:t>
+              <a:t>30/7/2026</a:t>
             </a:fld>
             <a:endParaRPr kumimoji="1" lang="zh-HK" altLang="en-US"/>
           </a:p>
@@ -623,7 +621,7 @@
           <a:p>
             <a:fld id="{7CB0CD84-F832-A74C-BF33-B303A6BFB4B1}" type="datetimeFigureOut">
               <a:rPr kumimoji="1" lang="zh-HK" altLang="en-US" smtClean="0"/>
-              <a:t>27/7/2026</a:t>
+              <a:t>30/7/2026</a:t>
             </a:fld>
             <a:endParaRPr kumimoji="1" lang="zh-HK" altLang="en-US"/>
           </a:p>
@@ -18976,7 +18974,7 @@
           <a:lstStyle/>
           <a:p>
             <a:r>
-              <a:rPr lang="en-US" altLang="zh-HK" sz="3200" dirty="0">
+              <a:rPr lang="en-US" altLang="zh-HK" sz="4000" dirty="0">
                 <a:solidFill>
                   <a:schemeClr val="tx1">
                     <a:lumMod val="10000"/>
@@ -18989,7 +18987,7 @@
           </a:p>
           <a:p>
             <a:r>
-              <a:rPr lang="en-US" altLang="zh-HK" sz="3200" dirty="0">
+              <a:rPr lang="en-US" altLang="zh-HK" sz="4000" dirty="0">
                 <a:solidFill>
                   <a:schemeClr val="tx1">
                     <a:lumMod val="10000"/>
@@ -18999,7 +18997,7 @@
               </a:rPr>
               <a:t>Project proposal</a:t>
             </a:r>
-            <a:endParaRPr lang="zh-HK" altLang="en-US" sz="3200" dirty="0">
+            <a:endParaRPr lang="zh-HK" altLang="en-US" sz="4000" dirty="0">
               <a:solidFill>
                 <a:schemeClr val="tx1">
                   <a:lumMod val="10000"/>
@@ -19042,18 +19040,6 @@
                 <a:latin typeface="Outfit"/>
               </a:rPr>
               <a:t>30 July 2026</a:t>
-            </a:r>
-            <a:r>
-              <a:rPr lang="zh-TW" altLang="en-US" dirty="0">
-                <a:latin typeface="Outfit"/>
-              </a:rPr>
-              <a:t/>
-            </a:r>
-            <a:r>
-              <a:rPr lang="en-HK" altLang="zh-TW" dirty="0">
-                <a:latin typeface="Outfit"/>
-              </a:rPr>
-              <a:t/>
             </a:r>
             <a:endParaRPr lang="zh-HK" altLang="en-US" dirty="0"/>
           </a:p>
@@ -19110,14 +19096,20 @@
           <a:lstStyle/>
           <a:p>
             <a:r>
-              <a:rPr sz="2200" spc="20" dirty="0">
+              <a:rPr lang="en-HK" spc="20" dirty="0">
                 <a:solidFill>
                   <a:srgbClr val="00B388"/>
                 </a:solidFill>
                 <a:latin typeface="Outfit" pitchFamily="2" charset="0"/>
               </a:rPr>
-              <a:t>One machine, built in-house</a:t>
-            </a:r>
+              <a:t>In-house built machine</a:t>
+            </a:r>
+            <a:endParaRPr spc="20" dirty="0">
+              <a:solidFill>
+                <a:srgbClr val="00B388"/>
+              </a:solidFill>
+              <a:latin typeface="Outfit" pitchFamily="2" charset="0"/>
+            </a:endParaRPr>
           </a:p>
         </p:txBody>
       </p:sp>
@@ -19144,24 +19136,6 @@
                 <a:latin typeface="AvenirNext LT Pro Medium"/>
               </a:rPr>
               <a:t>NITRIDE MBE PROPOSAL · MOTIVATION</a:t>
-            </a:r>
-            <a:r>
-              <a:rPr lang="en-HK" sz="800" spc="80" dirty="0">
-                <a:solidFill>
-                  <a:srgbClr val="191919"/>
-                </a:solidFill>
-                <a:latin typeface="AvenirNext LT Pro Medium"/>
-              </a:rPr>
-              <a:t/>
-            </a:r>
-            <a:r>
-              <a:rPr sz="800" spc="80" dirty="0">
-                <a:solidFill>
-                  <a:srgbClr val="191919"/>
-                </a:solidFill>
-                <a:latin typeface="AvenirNext LT Pro Medium"/>
-              </a:rPr>
-              <a:t/>
             </a:r>
           </a:p>
         </p:txBody>
@@ -19209,6 +19183,7 @@
           <a:lstStyle/>
           <a:p>
             <a:pPr algn="ctr"/>
+            <a:endParaRPr/>
           </a:p>
         </p:txBody>
       </p:sp>
@@ -19249,16 +19224,16 @@
           </a:fontRef>
         </p:style>
         <p:txBody>
-          <a:bodyPr rtlCol="0" anchor="ctr" lIns="0" rIns="0" tIns="0" bIns="0"/>
+          <a:bodyPr lIns="0" tIns="0" rIns="0" bIns="0" rtlCol="0" anchor="ctr"/>
           <a:lstStyle/>
           <a:p>
             <a:pPr algn="ctr"/>
             <a:r>
-              <a:rPr sz="900">
+              <a:rPr sz="900" dirty="0">
                 <a:solidFill>
                   <a:srgbClr val="FFFFFF"/>
                 </a:solidFill>
-                <a:latin typeface="AvenirNext LT Pro Medium"/>
+                <a:latin typeface="Outfit" pitchFamily="2" charset="0"/>
               </a:rPr>
               <a:t>01</a:t>
             </a:r>
@@ -19274,7 +19249,7 @@
         <p:spPr>
           <a:xfrm>
             <a:off x="1124712" y="1554480"/>
-            <a:ext cx="1856232" cy="228600"/>
+            <a:ext cx="1856232" cy="204287"/>
           </a:xfrm>
           <a:prstGeom prst="rect">
             <a:avLst/>
@@ -19282,7 +19257,7 @@
           <a:noFill/>
         </p:spPr>
         <p:txBody>
-          <a:bodyPr wrap="square" anchor="t" lIns="0" rIns="0" tIns="0" bIns="0">
+          <a:bodyPr wrap="square" lIns="0" tIns="0" rIns="0" bIns="0" anchor="t">
             <a:spAutoFit/>
           </a:bodyPr>
           <a:lstStyle/>
@@ -19293,14 +19268,20 @@
               </a:lnSpc>
             </a:pPr>
             <a:r>
-              <a:rPr sz="1050">
+              <a:rPr sz="1200" b="1" dirty="0">
                 <a:solidFill>
                   <a:srgbClr val="191919"/>
                 </a:solidFill>
-                <a:latin typeface="AvenirNext LT Pro Medium"/>
+                <a:latin typeface="Outfit" pitchFamily="2" charset="0"/>
               </a:rPr>
               <a:t>Cost</a:t>
             </a:r>
+            <a:endParaRPr sz="1050" b="1" dirty="0">
+              <a:solidFill>
+                <a:srgbClr val="191919"/>
+              </a:solidFill>
+              <a:latin typeface="Outfit" pitchFamily="2" charset="0"/>
+            </a:endParaRPr>
           </a:p>
         </p:txBody>
       </p:sp>
@@ -19313,7 +19294,7 @@
         <p:spPr>
           <a:xfrm>
             <a:off x="740664" y="1956816"/>
-            <a:ext cx="2240280" cy="914400"/>
+            <a:ext cx="2240280" cy="593560"/>
           </a:xfrm>
           <a:prstGeom prst="rect">
             <a:avLst/>
@@ -19321,7 +19302,7 @@
           <a:noFill/>
         </p:spPr>
         <p:txBody>
-          <a:bodyPr wrap="square" anchor="t" lIns="0" rIns="0" tIns="0" bIns="0">
+          <a:bodyPr wrap="square" lIns="0" tIns="0" rIns="0" bIns="0" anchor="t">
             <a:spAutoFit/>
           </a:bodyPr>
           <a:lstStyle/>
@@ -19332,22 +19313,58 @@
               </a:lnSpc>
             </a:pPr>
             <a:r>
-              <a:rPr sz="760">
+              <a:rPr lang="en-HK" sz="1100" dirty="0">
                 <a:solidFill>
                   <a:srgbClr val="191919"/>
                 </a:solidFill>
-                <a:latin typeface="AvenirNext LT Pro Medium"/>
+                <a:latin typeface="Outfit" pitchFamily="2" charset="0"/>
               </a:rPr>
-              <a:t>US$0.9–1.5M</a:t>
-            </a:r>
-            <a:r>
-              <a:rPr sz="760">
+              <a:t>Estimated </a:t>
+            </a:r>
+            <a:r>
+              <a:rPr sz="1100" dirty="0">
                 <a:solidFill>
                   <a:srgbClr val="191919"/>
                 </a:solidFill>
-                <a:latin typeface="Outfit"/>
+                <a:latin typeface="Outfit" pitchFamily="2" charset="0"/>
               </a:rPr>
-              <a:t> all-in from a used chassis; annual run cost ~US$60–120k</a:t>
+              <a:t>US$0.9–1.5M </a:t>
+            </a:r>
+            <a:r>
+              <a:rPr lang="en-HK" sz="1100" dirty="0">
+                <a:solidFill>
+                  <a:srgbClr val="191919"/>
+                </a:solidFill>
+                <a:latin typeface="Outfit" pitchFamily="2" charset="0"/>
+              </a:rPr>
+              <a:t>for entire chamber</a:t>
+            </a:r>
+            <a:r>
+              <a:rPr sz="1100" dirty="0">
+                <a:solidFill>
+                  <a:srgbClr val="191919"/>
+                </a:solidFill>
+                <a:latin typeface="Outfit" pitchFamily="2" charset="0"/>
+              </a:rPr>
+              <a:t>;</a:t>
+            </a:r>
+            <a:r>
+              <a:rPr lang="en-HK" sz="1100" dirty="0">
+                <a:solidFill>
+                  <a:srgbClr val="191919"/>
+                </a:solidFill>
+                <a:latin typeface="Outfit" pitchFamily="2" charset="0"/>
+              </a:rPr>
+              <a:t> Depends on quotes;</a:t>
+            </a:r>
+            <a:r>
+              <a:rPr sz="1100" dirty="0">
+                <a:solidFill>
+                  <a:srgbClr val="191919"/>
+                </a:solidFill>
+                <a:latin typeface="Outfit" pitchFamily="2" charset="0"/>
+              </a:rPr>
+              <a:t> annual run cost ~US$60–120k</a:t>
             </a:r>
           </a:p>
         </p:txBody>
@@ -19395,6 +19412,7 @@
           <a:lstStyle/>
           <a:p>
             <a:pPr algn="ctr"/>
+            <a:endParaRPr/>
           </a:p>
         </p:txBody>
       </p:sp>
@@ -19435,19 +19453,25 @@
           </a:fontRef>
         </p:style>
         <p:txBody>
-          <a:bodyPr rtlCol="0" anchor="ctr" lIns="0" rIns="0" tIns="0" bIns="0"/>
+          <a:bodyPr lIns="0" tIns="0" rIns="0" bIns="0" rtlCol="0" anchor="ctr"/>
           <a:lstStyle/>
           <a:p>
             <a:pPr algn="ctr"/>
             <a:r>
-              <a:rPr sz="900">
+              <a:rPr sz="1050" dirty="0">
                 <a:solidFill>
                   <a:srgbClr val="FFFFFF"/>
                 </a:solidFill>
-                <a:latin typeface="AvenirNext LT Pro Medium"/>
+                <a:latin typeface="Outfit" pitchFamily="2" charset="0"/>
               </a:rPr>
               <a:t>02</a:t>
             </a:r>
+            <a:endParaRPr sz="900" dirty="0">
+              <a:solidFill>
+                <a:srgbClr val="FFFFFF"/>
+              </a:solidFill>
+              <a:latin typeface="Outfit" pitchFamily="2" charset="0"/>
+            </a:endParaRPr>
           </a:p>
         </p:txBody>
       </p:sp>
@@ -19460,7 +19484,7 @@
         <p:spPr>
           <a:xfrm>
             <a:off x="3822191" y="1554480"/>
-            <a:ext cx="1856232" cy="228600"/>
+            <a:ext cx="1856232" cy="204287"/>
           </a:xfrm>
           <a:prstGeom prst="rect">
             <a:avLst/>
@@ -19468,7 +19492,7 @@
           <a:noFill/>
         </p:spPr>
         <p:txBody>
-          <a:bodyPr wrap="square" anchor="t" lIns="0" rIns="0" tIns="0" bIns="0">
+          <a:bodyPr wrap="square" lIns="0" tIns="0" rIns="0" bIns="0" anchor="t">
             <a:spAutoFit/>
           </a:bodyPr>
           <a:lstStyle/>
@@ -19479,14 +19503,29 @@
               </a:lnSpc>
             </a:pPr>
             <a:r>
-              <a:rPr sz="1050">
+              <a:rPr sz="1200" b="1" dirty="0">
                 <a:solidFill>
                   <a:srgbClr val="191919"/>
                 </a:solidFill>
-                <a:latin typeface="AvenirNext LT Pro Medium"/>
+                <a:latin typeface="Outfit" pitchFamily="2" charset="0"/>
               </a:rPr>
               <a:t>Capability</a:t>
             </a:r>
+            <a:r>
+              <a:rPr lang="en-HK" sz="1200" b="1" dirty="0">
+                <a:solidFill>
+                  <a:srgbClr val="191919"/>
+                </a:solidFill>
+                <a:latin typeface="Outfit" pitchFamily="2" charset="0"/>
+              </a:rPr>
+              <a:t> &amp; Needs</a:t>
+            </a:r>
+            <a:endParaRPr sz="1050" b="1" dirty="0">
+              <a:solidFill>
+                <a:srgbClr val="191919"/>
+              </a:solidFill>
+              <a:latin typeface="Outfit" pitchFamily="2" charset="0"/>
+            </a:endParaRPr>
           </a:p>
         </p:txBody>
       </p:sp>
@@ -19499,7 +19538,7 @@
         <p:spPr>
           <a:xfrm>
             <a:off x="3438144" y="1956816"/>
-            <a:ext cx="2240280" cy="914400"/>
+            <a:ext cx="2240280" cy="593560"/>
           </a:xfrm>
           <a:prstGeom prst="rect">
             <a:avLst/>
@@ -19507,7 +19546,7 @@
           <a:noFill/>
         </p:spPr>
         <p:txBody>
-          <a:bodyPr wrap="square" anchor="t" lIns="0" rIns="0" tIns="0" bIns="0">
+          <a:bodyPr wrap="square" lIns="0" tIns="0" rIns="0" bIns="0" anchor="t">
             <a:spAutoFit/>
           </a:bodyPr>
           <a:lstStyle/>
@@ -19518,23 +19557,65 @@
               </a:lnSpc>
             </a:pPr>
             <a:r>
-              <a:rPr sz="760">
+              <a:rPr sz="1100" dirty="0">
                 <a:solidFill>
                   <a:srgbClr val="191919"/>
                 </a:solidFill>
-                <a:latin typeface="AvenirNext LT Pro Medium"/>
+                <a:latin typeface="Outfit" pitchFamily="2" charset="0"/>
               </a:rPr>
-              <a:t>1200 °C</a:t>
-            </a:r>
-            <a:r>
-              <a:rPr sz="760">
+              <a:t>1200 °C substrate heater </a:t>
+            </a:r>
+            <a:r>
+              <a:rPr lang="en-HK" sz="1100" dirty="0">
                 <a:solidFill>
                   <a:srgbClr val="191919"/>
                 </a:solidFill>
-                <a:latin typeface="Outfit"/>
+                <a:latin typeface="Outfit" pitchFamily="2" charset="0"/>
               </a:rPr>
-              <a:t> substrate heater unlocks selective-area growth (needs ≥930 °C) and AlN — standard tools stop at 900 °C</a:t>
-            </a:r>
+              <a:t>for</a:t>
+            </a:r>
+            <a:r>
+              <a:rPr sz="1100" dirty="0">
+                <a:solidFill>
+                  <a:srgbClr val="191919"/>
+                </a:solidFill>
+                <a:latin typeface="Outfit" pitchFamily="2" charset="0"/>
+              </a:rPr>
+              <a:t> selective-area </a:t>
+            </a:r>
+            <a:r>
+              <a:rPr lang="en-HK" sz="1100" dirty="0">
+                <a:solidFill>
+                  <a:srgbClr val="191919"/>
+                </a:solidFill>
+                <a:latin typeface="Outfit" pitchFamily="2" charset="0"/>
+              </a:rPr>
+              <a:t>re</a:t>
+            </a:r>
+            <a:r>
+              <a:rPr sz="1100" dirty="0">
+                <a:solidFill>
+                  <a:srgbClr val="191919"/>
+                </a:solidFill>
+                <a:latin typeface="Outfit" pitchFamily="2" charset="0"/>
+              </a:rPr>
+              <a:t>growth </a:t>
+            </a:r>
+            <a:r>
+              <a:rPr lang="en-HK" sz="1100" dirty="0">
+                <a:solidFill>
+                  <a:srgbClr val="191919"/>
+                </a:solidFill>
+                <a:latin typeface="Outfit" pitchFamily="2" charset="0"/>
+              </a:rPr>
+              <a:t>and normal epitaxy</a:t>
+            </a:r>
+            <a:endParaRPr sz="1100" dirty="0">
+              <a:solidFill>
+                <a:srgbClr val="191919"/>
+              </a:solidFill>
+              <a:latin typeface="Outfit" pitchFamily="2" charset="0"/>
+            </a:endParaRPr>
           </a:p>
         </p:txBody>
       </p:sp>
@@ -19581,6 +19662,7 @@
           <a:lstStyle/>
           <a:p>
             <a:pPr algn="ctr"/>
+            <a:endParaRPr/>
           </a:p>
         </p:txBody>
       </p:sp>
@@ -19621,19 +19703,25 @@
           </a:fontRef>
         </p:style>
         <p:txBody>
-          <a:bodyPr rtlCol="0" anchor="ctr" lIns="0" rIns="0" tIns="0" bIns="0"/>
+          <a:bodyPr lIns="0" tIns="0" rIns="0" bIns="0" rtlCol="0" anchor="ctr"/>
           <a:lstStyle/>
           <a:p>
             <a:pPr algn="ctr"/>
             <a:r>
-              <a:rPr sz="900">
+              <a:rPr sz="1050" dirty="0">
                 <a:solidFill>
                   <a:srgbClr val="FFFFFF"/>
                 </a:solidFill>
-                <a:latin typeface="AvenirNext LT Pro Medium"/>
+                <a:latin typeface="Outfit" pitchFamily="2" charset="0"/>
               </a:rPr>
               <a:t>03</a:t>
             </a:r>
+            <a:endParaRPr sz="900" dirty="0">
+              <a:solidFill>
+                <a:srgbClr val="FFFFFF"/>
+              </a:solidFill>
+              <a:latin typeface="Outfit" pitchFamily="2" charset="0"/>
+            </a:endParaRPr>
           </a:p>
         </p:txBody>
       </p:sp>
@@ -19646,7 +19734,7 @@
         <p:spPr>
           <a:xfrm>
             <a:off x="6519672" y="1554480"/>
-            <a:ext cx="1856232" cy="228600"/>
+            <a:ext cx="1856232" cy="204287"/>
           </a:xfrm>
           <a:prstGeom prst="rect">
             <a:avLst/>
@@ -19654,7 +19742,7 @@
           <a:noFill/>
         </p:spPr>
         <p:txBody>
-          <a:bodyPr wrap="square" anchor="t" lIns="0" rIns="0" tIns="0" bIns="0">
+          <a:bodyPr wrap="square" lIns="0" tIns="0" rIns="0" bIns="0" anchor="t">
             <a:spAutoFit/>
           </a:bodyPr>
           <a:lstStyle/>
@@ -19665,14 +19753,20 @@
               </a:lnSpc>
             </a:pPr>
             <a:r>
-              <a:rPr sz="1050">
+              <a:rPr lang="en-HK" sz="1200" b="1" dirty="0">
                 <a:solidFill>
                   <a:srgbClr val="191919"/>
                 </a:solidFill>
-                <a:latin typeface="AvenirNext LT Pro Medium"/>
+                <a:latin typeface="Outfit" pitchFamily="2" charset="0"/>
               </a:rPr>
-              <a:t>Control</a:t>
-            </a:r>
+              <a:t>In-Situ Control</a:t>
+            </a:r>
+            <a:endParaRPr sz="1050" b="1" dirty="0">
+              <a:solidFill>
+                <a:srgbClr val="191919"/>
+              </a:solidFill>
+              <a:latin typeface="Outfit" pitchFamily="2" charset="0"/>
+            </a:endParaRPr>
           </a:p>
         </p:txBody>
       </p:sp>
@@ -19685,7 +19779,7 @@
         <p:spPr>
           <a:xfrm>
             <a:off x="6135624" y="1956816"/>
-            <a:ext cx="2240280" cy="914400"/>
+            <a:ext cx="2240280" cy="593560"/>
           </a:xfrm>
           <a:prstGeom prst="rect">
             <a:avLst/>
@@ -19693,7 +19787,7 @@
           <a:noFill/>
         </p:spPr>
         <p:txBody>
-          <a:bodyPr wrap="square" anchor="t" lIns="0" rIns="0" tIns="0" bIns="0">
+          <a:bodyPr wrap="square" lIns="0" tIns="0" rIns="0" bIns="0" anchor="t">
             <a:spAutoFit/>
           </a:bodyPr>
           <a:lstStyle/>
@@ -19704,32 +19798,20 @@
               </a:lnSpc>
             </a:pPr>
             <a:r>
-              <a:rPr sz="760">
+              <a:rPr lang="en-HK" sz="1100" dirty="0">
                 <a:solidFill>
                   <a:srgbClr val="191919"/>
                 </a:solidFill>
-                <a:latin typeface="Outfit"/>
+                <a:latin typeface="Outfit" pitchFamily="2" charset="0"/>
               </a:rPr>
-              <a:t>Control + DAQ software built in-house — </a:t>
-            </a:r>
-            <a:r>
-              <a:rPr sz="760">
-                <a:solidFill>
-                  <a:srgbClr val="191919"/>
-                </a:solidFill>
-                <a:latin typeface="AvenirNext LT Pro Medium"/>
-              </a:rPr>
-              <a:t>ATLAS autonomy (L1–L4)</a:t>
-            </a:r>
-            <a:r>
-              <a:rPr sz="760">
-                <a:solidFill>
-                  <a:srgbClr val="191919"/>
-                </a:solidFill>
-                <a:latin typeface="Outfit"/>
-              </a:rPr>
-              <a:t> native from day one</a:t>
-            </a:r>
+              <a:t>RHEED video output; Heater temperature knobs; Shutter &amp; flux control</a:t>
+            </a:r>
+            <a:endParaRPr sz="1100" dirty="0">
+              <a:solidFill>
+                <a:srgbClr val="191919"/>
+              </a:solidFill>
+              <a:latin typeface="Outfit" pitchFamily="2" charset="0"/>
+            </a:endParaRPr>
           </a:p>
         </p:txBody>
       </p:sp>
@@ -19776,6 +19858,7 @@
           <a:lstStyle/>
           <a:p>
             <a:pPr algn="ctr"/>
+            <a:endParaRPr/>
           </a:p>
         </p:txBody>
       </p:sp>
@@ -19787,8 +19870,8 @@
         </p:nvSpPr>
         <p:spPr>
           <a:xfrm>
-            <a:off x="841248" y="3310128"/>
-            <a:ext cx="1234440" cy="658368"/>
+            <a:off x="841248" y="3545665"/>
+            <a:ext cx="1234440" cy="187295"/>
           </a:xfrm>
           <a:prstGeom prst="rect">
             <a:avLst/>
@@ -19796,7 +19879,7 @@
           <a:noFill/>
         </p:spPr>
         <p:txBody>
-          <a:bodyPr wrap="square" anchor="ctr" lIns="0" rIns="0" tIns="0" bIns="0">
+          <a:bodyPr wrap="square" lIns="0" tIns="0" rIns="0" bIns="0" anchor="ctr">
             <a:spAutoFit/>
           </a:bodyPr>
           <a:lstStyle/>
@@ -19807,14 +19890,20 @@
               </a:lnSpc>
             </a:pPr>
             <a:r>
-              <a:rPr sz="750" spc="60">
+              <a:rPr sz="1100" spc="60" dirty="0">
                 <a:solidFill>
                   <a:srgbClr val="00B388"/>
                 </a:solidFill>
-                <a:latin typeface="AvenirNext LT Pro Medium"/>
+                <a:latin typeface="Outfit" pitchFamily="2" charset="0"/>
               </a:rPr>
               <a:t>OBJECTIVE</a:t>
             </a:r>
+            <a:endParaRPr sz="750" spc="60" dirty="0">
+              <a:solidFill>
+                <a:srgbClr val="00B388"/>
+              </a:solidFill>
+              <a:latin typeface="Outfit" pitchFamily="2" charset="0"/>
+            </a:endParaRPr>
           </a:p>
         </p:txBody>
       </p:sp>
@@ -19826,8 +19915,8 @@
         </p:nvSpPr>
         <p:spPr>
           <a:xfrm>
-            <a:off x="2148840" y="3310128"/>
-            <a:ext cx="6172200" cy="658368"/>
+            <a:off x="2148840" y="3444099"/>
+            <a:ext cx="6172200" cy="390428"/>
           </a:xfrm>
           <a:prstGeom prst="rect">
             <a:avLst/>
@@ -19835,7 +19924,7 @@
           <a:noFill/>
         </p:spPr>
         <p:txBody>
-          <a:bodyPr wrap="square" anchor="ctr" lIns="0" rIns="0" tIns="0" bIns="0">
+          <a:bodyPr wrap="square" lIns="0" tIns="0" rIns="0" bIns="0" anchor="ctr">
             <a:spAutoFit/>
           </a:bodyPr>
           <a:lstStyle/>
@@ -19846,52 +19935,58 @@
               </a:lnSpc>
             </a:pPr>
             <a:r>
-              <a:rPr sz="850">
+              <a:rPr lang="en-HK" sz="1100" dirty="0">
                 <a:solidFill>
                   <a:srgbClr val="FFFFFF"/>
                 </a:solidFill>
-                <a:latin typeface="AvenirNext LT Pro Medium"/>
+                <a:latin typeface="Outfit" pitchFamily="2" charset="0"/>
               </a:rPr>
-              <a:t>Used chassis + new nitride core + our own control software — one machine for planar epitaxy, SAG, and autonomous operation</a:t>
-            </a:r>
-          </a:p>
-        </p:txBody>
-      </p:sp>
-      <p:sp>
-        <p:nvSpPr>
-          <p:cNvPr id="19" name="TextBox 18"/>
-          <p:cNvSpPr txBox="1"/>
-          <p:nvPr/>
-        </p:nvSpPr>
-        <p:spPr>
-          <a:xfrm>
-            <a:off x="612648" y="4261104"/>
-            <a:ext cx="7918704" cy="228600"/>
-          </a:xfrm>
-          <a:prstGeom prst="rect">
-            <a:avLst/>
-          </a:prstGeom>
-          <a:noFill/>
-        </p:spPr>
-        <p:txBody>
-          <a:bodyPr wrap="square" anchor="t" lIns="0" rIns="0" tIns="0" bIns="0">
-            <a:spAutoFit/>
-          </a:bodyPr>
-          <a:lstStyle/>
-          <a:p>
-            <a:pPr algn="l">
-              <a:lnSpc>
-                <a:spcPct val="120000"/>
-              </a:lnSpc>
-            </a:pPr>
-            <a:r>
-              <a:rPr sz="680">
-                <a:solidFill>
-                  <a:srgbClr val="666666"/>
-                </a:solidFill>
-                <a:latin typeface="Outfit"/>
+              <a:t>MBE chamber</a:t>
+            </a:r>
+            <a:r>
+              <a:rPr sz="1100" dirty="0">
+                <a:solidFill>
+                  <a:srgbClr val="FFFFFF"/>
+                </a:solidFill>
+                <a:latin typeface="Outfit" pitchFamily="2" charset="0"/>
               </a:rPr>
-              <a:t>Cost figures are planning estimates; MBE vendors quote on request.</a:t>
+              <a:t> + </a:t>
+            </a:r>
+            <a:r>
+              <a:rPr lang="en-HK" sz="1100" dirty="0">
+                <a:solidFill>
+                  <a:srgbClr val="FFFFFF"/>
+                </a:solidFill>
+                <a:latin typeface="Outfit" pitchFamily="2" charset="0"/>
+              </a:rPr>
+              <a:t>plasma source + heater + effusion cells</a:t>
+            </a:r>
+            <a:r>
+              <a:rPr sz="1100" dirty="0">
+                <a:solidFill>
+                  <a:srgbClr val="FFFFFF"/>
+                </a:solidFill>
+                <a:latin typeface="Outfit" pitchFamily="2" charset="0"/>
+              </a:rPr>
+              <a:t> + control software — one machine for epitaxy, </a:t>
+            </a:r>
+            <a:r>
+              <a:rPr lang="en-HK" sz="1100" dirty="0">
+                <a:solidFill>
+                  <a:srgbClr val="FFFFFF"/>
+                </a:solidFill>
+                <a:latin typeface="Outfit" pitchFamily="2" charset="0"/>
+              </a:rPr>
+              <a:t>selective area growth</a:t>
+            </a:r>
+            <a:r>
+              <a:rPr sz="1100" dirty="0">
+                <a:solidFill>
+                  <a:srgbClr val="FFFFFF"/>
+                </a:solidFill>
+                <a:latin typeface="Outfit" pitchFamily="2" charset="0"/>
+              </a:rPr>
+              <a:t>, and autonomous operation</a:t>
             </a:r>
           </a:p>
         </p:txBody>
@@ -19937,22 +20032,13 @@
           <a:lstStyle/>
           <a:p>
             <a:r>
-              <a:rPr sz="2200" spc="20" dirty="0">
+              <a:rPr lang="en-HK" sz="2200" spc="20" dirty="0">
                 <a:solidFill>
                   <a:srgbClr val="00B388"/>
                 </a:solidFill>
                 <a:latin typeface="AvenirNext LT Pro Light"/>
               </a:rPr>
-              <a:t>Everything we buy</a:t>
-            </a:r>
-            <a:r>
-              <a:rPr lang="en-HK" sz="2200" spc="20" dirty="0">
-                <a:solidFill>
-                  <a:srgbClr val="00B388"/>
-                </a:solidFill>
-                <a:latin typeface="AvenirNext LT Pro Light"/>
-              </a:rPr>
-              <a:t/>
+              <a:t>MBE components</a:t>
             </a:r>
             <a:endParaRPr sz="2200" spc="20" dirty="0">
               <a:solidFill>
@@ -19986,45 +20072,6 @@
                 <a:latin typeface="AvenirNext LT Pro Medium"/>
               </a:rPr>
               <a:t>NITRIDE MBE PROPOSAL · PARTS</a:t>
-            </a:r>
-          </a:p>
-        </p:txBody>
-      </p:sp>
-      <p:sp>
-        <p:nvSpPr>
-          <p:cNvPr id="4" name="TextBox 3"/>
-          <p:cNvSpPr txBox="1"/>
-          <p:nvPr/>
-        </p:nvSpPr>
-        <p:spPr>
-          <a:xfrm>
-            <a:off x="612648" y="1280160"/>
-            <a:ext cx="7918704" cy="146304"/>
-          </a:xfrm>
-          <a:prstGeom prst="rect">
-            <a:avLst/>
-          </a:prstGeom>
-          <a:noFill/>
-        </p:spPr>
-        <p:txBody>
-          <a:bodyPr wrap="square" anchor="t" lIns="0" rIns="0" tIns="0" bIns="0">
-            <a:spAutoFit/>
-          </a:bodyPr>
-          <a:lstStyle/>
-          <a:p>
-            <a:pPr algn="l">
-              <a:lnSpc>
-                <a:spcPct val="120000"/>
-              </a:lnSpc>
-            </a:pPr>
-            <a:r>
-              <a:rPr sz="700" spc="60">
-                <a:solidFill>
-                  <a:srgbClr val="666666"/>
-                </a:solidFill>
-                <a:latin typeface="AvenirNext LT Pro Medium"/>
-              </a:rPr>
-              <a:t>BUY USED</a:t>
             </a:r>
           </a:p>
         </p:txBody>
@@ -20072,6 +20119,7 @@
           <a:lstStyle/>
           <a:p>
             <a:pPr algn="ctr"/>
+            <a:endParaRPr/>
           </a:p>
         </p:txBody>
       </p:sp>
@@ -20084,7 +20132,7 @@
           <p:nvPr/>
         </p:nvPicPr>
         <p:blipFill>
-          <a:blip r:embed="rId7"/>
+          <a:blip r:embed="rId3"/>
           <a:stretch>
             <a:fillRect/>
           </a:stretch>
@@ -20108,7 +20156,7 @@
         <p:spPr>
           <a:xfrm>
             <a:off x="1161288" y="1517904"/>
-            <a:ext cx="7260336" cy="182880"/>
+            <a:ext cx="7260336" cy="170239"/>
           </a:xfrm>
           <a:prstGeom prst="rect">
             <a:avLst/>
@@ -20116,7 +20164,7 @@
           <a:noFill/>
         </p:spPr>
         <p:txBody>
-          <a:bodyPr wrap="square" anchor="t" lIns="0" rIns="0" tIns="0" bIns="0">
+          <a:bodyPr wrap="square" lIns="0" tIns="0" rIns="0" bIns="0" anchor="t">
             <a:spAutoFit/>
           </a:bodyPr>
           <a:lstStyle/>
@@ -20127,13 +20175,31 @@
               </a:lnSpc>
             </a:pPr>
             <a:r>
-              <a:rPr sz="860">
+              <a:rPr sz="1000" b="1" dirty="0">
                 <a:solidFill>
                   <a:srgbClr val="191919"/>
                 </a:solidFill>
-                <a:latin typeface="AvenirNext LT Pro Medium"/>
+                <a:latin typeface="Outfit" pitchFamily="2" charset="0"/>
               </a:rPr>
-              <a:t>MBE chassis — Veeco GEN II / Riber 32 class</a:t>
+              <a:t>MBE </a:t>
+            </a:r>
+            <a:r>
+              <a:rPr lang="en-HK" sz="1000" b="1" dirty="0">
+                <a:solidFill>
+                  <a:srgbClr val="191919"/>
+                </a:solidFill>
+                <a:latin typeface="Outfit" pitchFamily="2" charset="0"/>
+              </a:rPr>
+              <a:t>chamber</a:t>
+            </a:r>
+            <a:r>
+              <a:rPr sz="1000" b="1" dirty="0">
+                <a:solidFill>
+                  <a:srgbClr val="191919"/>
+                </a:solidFill>
+                <a:latin typeface="Outfit" pitchFamily="2" charset="0"/>
+              </a:rPr>
+              <a:t> — Veeco GEN II / Riber 32 class</a:t>
             </a:r>
           </a:p>
         </p:txBody>
@@ -20147,7 +20213,7 @@
         <p:spPr>
           <a:xfrm>
             <a:off x="1161288" y="1700784"/>
-            <a:ext cx="7260336" cy="201168"/>
+            <a:ext cx="7260336" cy="160493"/>
           </a:xfrm>
           <a:prstGeom prst="rect">
             <a:avLst/>
@@ -20155,7 +20221,7 @@
           <a:noFill/>
         </p:spPr>
         <p:txBody>
-          <a:bodyPr wrap="square" anchor="t" lIns="0" rIns="0" tIns="0" bIns="0">
+          <a:bodyPr wrap="square" lIns="0" tIns="0" rIns="0" bIns="0" anchor="t">
             <a:spAutoFit/>
           </a:bodyPr>
           <a:lstStyle/>
@@ -20166,52 +20232,112 @@
               </a:lnSpc>
             </a:pPr>
             <a:r>
-              <a:rPr sz="700">
+              <a:rPr lang="en-HK" sz="1000" dirty="0">
                 <a:solidFill>
                   <a:srgbClr val="666666"/>
                 </a:solidFill>
                 <a:latin typeface="Outfit"/>
               </a:rPr>
-              <a:t>growth + buffer + load-lock chambers · frame · transfer mechanics · LN₂ shroud · load-lock cryopump · racks</a:t>
-            </a:r>
-          </a:p>
-        </p:txBody>
-      </p:sp>
-      <p:sp>
-        <p:nvSpPr>
-          <p:cNvPr id="9" name="TextBox 8"/>
-          <p:cNvSpPr txBox="1"/>
-          <p:nvPr/>
-        </p:nvSpPr>
-        <p:spPr>
-          <a:xfrm>
-            <a:off x="612648" y="2084831"/>
-            <a:ext cx="7918704" cy="146304"/>
-          </a:xfrm>
-          <a:prstGeom prst="rect">
-            <a:avLst/>
-          </a:prstGeom>
-          <a:noFill/>
-        </p:spPr>
-        <p:txBody>
-          <a:bodyPr wrap="square" anchor="t" lIns="0" rIns="0" tIns="0" bIns="0">
-            <a:spAutoFit/>
-          </a:bodyPr>
-          <a:lstStyle/>
-          <a:p>
-            <a:pPr algn="l">
-              <a:lnSpc>
-                <a:spcPct val="120000"/>
-              </a:lnSpc>
-            </a:pPr>
-            <a:r>
-              <a:rPr sz="700" spc="60">
-                <a:solidFill>
-                  <a:srgbClr val="00B388"/>
-                </a:solidFill>
-                <a:latin typeface="AvenirNext LT Pro Medium"/>
+              <a:t>G</a:t>
+            </a:r>
+            <a:r>
+              <a:rPr sz="1000" dirty="0" err="1">
+                <a:solidFill>
+                  <a:srgbClr val="666666"/>
+                </a:solidFill>
+                <a:latin typeface="Outfit"/>
               </a:rPr>
-              <a:t>BUY NEW</a:t>
+              <a:t>rowth</a:t>
+            </a:r>
+            <a:r>
+              <a:rPr lang="en-US" altLang="ja-JP" sz="1000" dirty="0">
+                <a:solidFill>
+                  <a:srgbClr val="666666"/>
+                </a:solidFill>
+                <a:latin typeface="Outfit"/>
+              </a:rPr>
+              <a:t>, </a:t>
+            </a:r>
+            <a:r>
+              <a:rPr sz="1000" dirty="0">
+                <a:solidFill>
+                  <a:srgbClr val="666666"/>
+                </a:solidFill>
+                <a:latin typeface="Outfit"/>
+              </a:rPr>
+              <a:t>buffer</a:t>
+            </a:r>
+            <a:r>
+              <a:rPr lang="en-HK" sz="1000" dirty="0">
+                <a:solidFill>
+                  <a:srgbClr val="666666"/>
+                </a:solidFill>
+                <a:latin typeface="Outfit"/>
+              </a:rPr>
+              <a:t> and </a:t>
+            </a:r>
+            <a:r>
+              <a:rPr sz="1000" dirty="0">
+                <a:solidFill>
+                  <a:srgbClr val="666666"/>
+                </a:solidFill>
+                <a:latin typeface="Outfit"/>
+              </a:rPr>
+              <a:t>load-lock chambers · </a:t>
+            </a:r>
+            <a:r>
+              <a:rPr lang="en-HK" sz="1000" dirty="0">
+                <a:solidFill>
+                  <a:srgbClr val="666666"/>
+                </a:solidFill>
+                <a:latin typeface="Outfit"/>
+              </a:rPr>
+              <a:t>chamber </a:t>
+            </a:r>
+            <a:r>
+              <a:rPr sz="1000" dirty="0">
+                <a:solidFill>
+                  <a:srgbClr val="666666"/>
+                </a:solidFill>
+                <a:latin typeface="Outfit"/>
+              </a:rPr>
+              <a:t>frame · transfer </a:t>
+            </a:r>
+            <a:r>
+              <a:rPr lang="en-HK" sz="1000" dirty="0">
+                <a:solidFill>
+                  <a:srgbClr val="666666"/>
+                </a:solidFill>
+                <a:latin typeface="Outfit"/>
+              </a:rPr>
+              <a:t>system</a:t>
+            </a:r>
+            <a:r>
+              <a:rPr sz="1000" dirty="0">
+                <a:solidFill>
+                  <a:srgbClr val="666666"/>
+                </a:solidFill>
+                <a:latin typeface="Outfit"/>
+              </a:rPr>
+              <a:t> · </a:t>
+            </a:r>
+            <a:r>
+              <a:rPr lang="en-HK" sz="1000" dirty="0">
+                <a:solidFill>
+                  <a:srgbClr val="666666"/>
+                </a:solidFill>
+                <a:latin typeface="Outfit"/>
+              </a:rPr>
+              <a:t>liquid nitrogen</a:t>
+            </a:r>
+            <a:r>
+              <a:rPr sz="1000" dirty="0">
+                <a:solidFill>
+                  <a:srgbClr val="666666"/>
+                </a:solidFill>
+                <a:latin typeface="Outfit"/>
+              </a:rPr>
+              <a:t> shroud · load-lock cryopump · racks</a:t>
             </a:r>
           </a:p>
         </p:txBody>
@@ -20224,7 +20350,7 @@
         </p:nvSpPr>
         <p:spPr>
           <a:xfrm>
-            <a:off x="612648" y="2249424"/>
+            <a:off x="611187" y="2088578"/>
             <a:ext cx="2514600" cy="512064"/>
           </a:xfrm>
           <a:prstGeom prst="roundRect">
@@ -20259,6 +20385,7 @@
           <a:lstStyle/>
           <a:p>
             <a:pPr algn="ctr"/>
+            <a:endParaRPr/>
           </a:p>
         </p:txBody>
       </p:sp>
@@ -20271,14 +20398,14 @@
           <p:nvPr/>
         </p:nvPicPr>
         <p:blipFill>
-          <a:blip r:embed="rId8"/>
+          <a:blip r:embed="rId4"/>
           <a:stretch>
             <a:fillRect/>
           </a:stretch>
         </p:blipFill>
         <p:spPr>
           <a:xfrm>
-            <a:off x="704088" y="2322576"/>
+            <a:off x="702627" y="2161730"/>
             <a:ext cx="365760" cy="365760"/>
           </a:xfrm>
           <a:prstGeom prst="rect">
@@ -20294,8 +20421,8 @@
         </p:nvSpPr>
         <p:spPr>
           <a:xfrm>
-            <a:off x="1161288" y="2322576"/>
-            <a:ext cx="1856232" cy="182880"/>
+            <a:off x="1168971" y="2129232"/>
+            <a:ext cx="1856232" cy="152734"/>
           </a:xfrm>
           <a:prstGeom prst="rect">
             <a:avLst/>
@@ -20303,7 +20430,7 @@
           <a:noFill/>
         </p:spPr>
         <p:txBody>
-          <a:bodyPr wrap="square" anchor="t" lIns="0" rIns="0" tIns="0" bIns="0">
+          <a:bodyPr wrap="square" lIns="0" tIns="0" rIns="0" bIns="0" anchor="t">
             <a:spAutoFit/>
           </a:bodyPr>
           <a:lstStyle/>
@@ -20314,11 +20441,11 @@
               </a:lnSpc>
             </a:pPr>
             <a:r>
-              <a:rPr sz="780">
+              <a:rPr sz="900" b="1" dirty="0">
                 <a:solidFill>
                   <a:srgbClr val="191919"/>
                 </a:solidFill>
-                <a:latin typeface="AvenirNext LT Pro Medium"/>
+                <a:latin typeface="Outfit" pitchFamily="2" charset="0"/>
               </a:rPr>
               <a:t>RF N₂ plasma source</a:t>
             </a:r>
@@ -20333,8 +20460,8 @@
         </p:nvSpPr>
         <p:spPr>
           <a:xfrm>
-            <a:off x="1161288" y="2505456"/>
-            <a:ext cx="1856232" cy="201168"/>
+            <a:off x="1159827" y="2296485"/>
+            <a:ext cx="1965960" cy="300082"/>
           </a:xfrm>
           <a:prstGeom prst="rect">
             <a:avLst/>
@@ -20342,7 +20469,7 @@
           <a:noFill/>
         </p:spPr>
         <p:txBody>
-          <a:bodyPr wrap="square" anchor="t" lIns="0" rIns="0" tIns="0" bIns="0">
+          <a:bodyPr wrap="square" lIns="0" tIns="0" rIns="0" bIns="0" anchor="t">
             <a:spAutoFit/>
           </a:bodyPr>
           <a:lstStyle/>
@@ -20353,13 +20480,49 @@
               </a:lnSpc>
             </a:pPr>
             <a:r>
-              <a:rPr sz="660">
+              <a:rPr sz="900" dirty="0">
                 <a:solidFill>
                   <a:srgbClr val="666666"/>
                 </a:solidFill>
                 <a:latin typeface="Outfit"/>
               </a:rPr>
-              <a:t>600 W · 13.56 MHz · auto-match network</a:t>
+              <a:t>600 W · </a:t>
+            </a:r>
+            <a:r>
+              <a:rPr lang="en-HK" sz="900" dirty="0">
+                <a:solidFill>
+                  <a:srgbClr val="666666"/>
+                </a:solidFill>
+                <a:latin typeface="Outfit"/>
+              </a:rPr>
+              <a:t>1</a:t>
+            </a:r>
+            <a:r>
+              <a:rPr sz="900" dirty="0">
+                <a:solidFill>
+                  <a:srgbClr val="666666"/>
+                </a:solidFill>
+                <a:latin typeface="Outfit"/>
+              </a:rPr>
+              <a:t>3.56 MHz ·</a:t>
+            </a:r>
+            <a:r>
+              <a:rPr lang="en-HK" sz="900" dirty="0">
+                <a:solidFill>
+                  <a:srgbClr val="666666"/>
+                </a:solidFill>
+                <a:latin typeface="Outfit"/>
+              </a:rPr>
+              <a:t>RF coil. matching</a:t>
+            </a:r>
+            <a:r>
+              <a:rPr sz="900" dirty="0">
+                <a:solidFill>
+                  <a:srgbClr val="666666"/>
+                </a:solidFill>
+                <a:latin typeface="Outfit"/>
+              </a:rPr>
+              <a:t> network</a:t>
             </a:r>
           </a:p>
         </p:txBody>
@@ -20372,7 +20535,7 @@
         </p:nvSpPr>
         <p:spPr>
           <a:xfrm>
-            <a:off x="3310128" y="2249424"/>
+            <a:off x="3308667" y="2088578"/>
             <a:ext cx="2514600" cy="512064"/>
           </a:xfrm>
           <a:prstGeom prst="roundRect">
@@ -20407,6 +20570,7 @@
           <a:lstStyle/>
           <a:p>
             <a:pPr algn="ctr"/>
+            <a:endParaRPr/>
           </a:p>
         </p:txBody>
       </p:sp>
@@ -20419,14 +20583,14 @@
           <p:nvPr/>
         </p:nvPicPr>
         <p:blipFill>
-          <a:blip r:embed="rId9"/>
+          <a:blip r:embed="rId5"/>
           <a:stretch>
             <a:fillRect/>
           </a:stretch>
         </p:blipFill>
         <p:spPr>
           <a:xfrm>
-            <a:off x="3401568" y="2322576"/>
+            <a:off x="3400107" y="2161730"/>
             <a:ext cx="365760" cy="365760"/>
           </a:xfrm>
           <a:prstGeom prst="rect">
@@ -20442,8 +20606,8 @@
         </p:nvSpPr>
         <p:spPr>
           <a:xfrm>
-            <a:off x="3858768" y="2322576"/>
-            <a:ext cx="1856232" cy="182880"/>
+            <a:off x="3857307" y="2134230"/>
+            <a:ext cx="1856232" cy="152734"/>
           </a:xfrm>
           <a:prstGeom prst="rect">
             <a:avLst/>
@@ -20451,7 +20615,7 @@
           <a:noFill/>
         </p:spPr>
         <p:txBody>
-          <a:bodyPr wrap="square" anchor="t" lIns="0" rIns="0" tIns="0" bIns="0">
+          <a:bodyPr wrap="square" lIns="0" tIns="0" rIns="0" bIns="0" anchor="t">
             <a:spAutoFit/>
           </a:bodyPr>
           <a:lstStyle/>
@@ -20462,14 +20626,29 @@
               </a:lnSpc>
             </a:pPr>
             <a:r>
-              <a:rPr sz="780">
+              <a:rPr sz="900" b="1" dirty="0">
                 <a:solidFill>
                   <a:srgbClr val="191919"/>
                 </a:solidFill>
-                <a:latin typeface="AvenirNext LT Pro Medium"/>
+                <a:latin typeface="Outfit" pitchFamily="2" charset="0"/>
               </a:rPr>
-              <a:t>N₂ gas train</a:t>
-            </a:r>
+              <a:t>N₂ gas </a:t>
+            </a:r>
+            <a:r>
+              <a:rPr lang="en-HK" sz="900" b="1" dirty="0">
+                <a:solidFill>
+                  <a:srgbClr val="191919"/>
+                </a:solidFill>
+                <a:latin typeface="Outfit" pitchFamily="2" charset="0"/>
+              </a:rPr>
+              <a:t>delivery system</a:t>
+            </a:r>
+            <a:endParaRPr sz="900" b="1" dirty="0">
+              <a:solidFill>
+                <a:srgbClr val="191919"/>
+              </a:solidFill>
+              <a:latin typeface="Outfit" pitchFamily="2" charset="0"/>
+            </a:endParaRPr>
           </a:p>
         </p:txBody>
       </p:sp>
@@ -20481,8 +20660,8 @@
         </p:nvSpPr>
         <p:spPr>
           <a:xfrm>
-            <a:off x="3858768" y="2505456"/>
-            <a:ext cx="1856232" cy="201168"/>
+            <a:off x="3857307" y="2303360"/>
+            <a:ext cx="1856232" cy="300082"/>
           </a:xfrm>
           <a:prstGeom prst="rect">
             <a:avLst/>
@@ -20490,7 +20669,7 @@
           <a:noFill/>
         </p:spPr>
         <p:txBody>
-          <a:bodyPr wrap="square" anchor="t" lIns="0" rIns="0" tIns="0" bIns="0">
+          <a:bodyPr wrap="square" lIns="0" tIns="0" rIns="0" bIns="0" anchor="t">
             <a:spAutoFit/>
           </a:bodyPr>
           <a:lstStyle/>
@@ -20501,14 +20680,38 @@
               </a:lnSpc>
             </a:pPr>
             <a:r>
-              <a:rPr sz="660">
+              <a:rPr lang="en-HK" sz="900" dirty="0">
                 <a:solidFill>
                   <a:srgbClr val="666666"/>
                 </a:solidFill>
                 <a:latin typeface="Outfit"/>
               </a:rPr>
-              <a:t>6N supply · getter purifier · MFC</a:t>
-            </a:r>
+              <a:t>99.9999% pure</a:t>
+            </a:r>
+            <a:r>
+              <a:rPr sz="900" dirty="0">
+                <a:solidFill>
+                  <a:srgbClr val="666666"/>
+                </a:solidFill>
+                <a:latin typeface="Outfit"/>
+              </a:rPr>
+              <a:t> supply · getter purifier · M</a:t>
+            </a:r>
+            <a:r>
+              <a:rPr lang="en-HK" sz="900" dirty="0">
+                <a:solidFill>
+                  <a:srgbClr val="666666"/>
+                </a:solidFill>
+                <a:latin typeface="Outfit"/>
+              </a:rPr>
+              <a:t>ass flow controller</a:t>
+            </a:r>
+            <a:endParaRPr sz="900" dirty="0">
+              <a:solidFill>
+                <a:srgbClr val="666666"/>
+              </a:solidFill>
+              <a:latin typeface="Outfit"/>
+            </a:endParaRPr>
           </a:p>
         </p:txBody>
       </p:sp>
@@ -20520,7 +20723,7 @@
         </p:nvSpPr>
         <p:spPr>
           <a:xfrm>
-            <a:off x="6007608" y="2249424"/>
+            <a:off x="6006147" y="2088578"/>
             <a:ext cx="2514600" cy="512064"/>
           </a:xfrm>
           <a:prstGeom prst="roundRect">
@@ -20555,6 +20758,7 @@
           <a:lstStyle/>
           <a:p>
             <a:pPr algn="ctr"/>
+            <a:endParaRPr/>
           </a:p>
         </p:txBody>
       </p:sp>
@@ -20567,14 +20771,14 @@
           <p:nvPr/>
         </p:nvPicPr>
         <p:blipFill>
-          <a:blip r:embed="rId10"/>
+          <a:blip r:embed="rId6"/>
           <a:stretch>
             <a:fillRect/>
           </a:stretch>
         </p:blipFill>
         <p:spPr>
           <a:xfrm>
-            <a:off x="6099048" y="2322576"/>
+            <a:off x="6097587" y="2161730"/>
             <a:ext cx="365760" cy="365760"/>
           </a:xfrm>
           <a:prstGeom prst="rect">
@@ -20590,8 +20794,8 @@
         </p:nvSpPr>
         <p:spPr>
           <a:xfrm>
-            <a:off x="6556248" y="2322576"/>
-            <a:ext cx="1856232" cy="182880"/>
+            <a:off x="6554787" y="2161730"/>
+            <a:ext cx="1856232" cy="152799"/>
           </a:xfrm>
           <a:prstGeom prst="rect">
             <a:avLst/>
@@ -20599,7 +20803,7 @@
           <a:noFill/>
         </p:spPr>
         <p:txBody>
-          <a:bodyPr wrap="square" anchor="t" lIns="0" rIns="0" tIns="0" bIns="0">
+          <a:bodyPr wrap="square" lIns="0" tIns="0" rIns="0" bIns="0" anchor="t">
             <a:spAutoFit/>
           </a:bodyPr>
           <a:lstStyle/>
@@ -20610,14 +20814,29 @@
               </a:lnSpc>
             </a:pPr>
             <a:r>
-              <a:rPr sz="780">
+              <a:rPr sz="900" b="1" dirty="0">
                 <a:solidFill>
                   <a:srgbClr val="191919"/>
                 </a:solidFill>
-                <a:latin typeface="AvenirNext LT Pro Medium"/>
+                <a:latin typeface="Outfit" pitchFamily="2" charset="0"/>
               </a:rPr>
-              <a:t>1200 °C manipulator</a:t>
-            </a:r>
+              <a:t>1200 °C </a:t>
+            </a:r>
+            <a:r>
+              <a:rPr lang="en-HK" sz="900" b="1" dirty="0">
+                <a:solidFill>
+                  <a:srgbClr val="191919"/>
+                </a:solidFill>
+                <a:latin typeface="Outfit" pitchFamily="2" charset="0"/>
+              </a:rPr>
+              <a:t>heater</a:t>
+            </a:r>
+            <a:endParaRPr sz="900" b="1" dirty="0">
+              <a:solidFill>
+                <a:srgbClr val="191919"/>
+              </a:solidFill>
+              <a:latin typeface="Outfit" pitchFamily="2" charset="0"/>
+            </a:endParaRPr>
           </a:p>
         </p:txBody>
       </p:sp>
@@ -20629,8 +20848,8 @@
         </p:nvSpPr>
         <p:spPr>
           <a:xfrm>
-            <a:off x="6556248" y="2505456"/>
-            <a:ext cx="1856232" cy="201168"/>
+            <a:off x="6554787" y="2344610"/>
+            <a:ext cx="1856232" cy="144976"/>
           </a:xfrm>
           <a:prstGeom prst="rect">
             <a:avLst/>
@@ -20638,7 +20857,7 @@
           <a:noFill/>
         </p:spPr>
         <p:txBody>
-          <a:bodyPr wrap="square" anchor="t" lIns="0" rIns="0" tIns="0" bIns="0">
+          <a:bodyPr wrap="square" lIns="0" tIns="0" rIns="0" bIns="0" anchor="t">
             <a:spAutoFit/>
           </a:bodyPr>
           <a:lstStyle/>
@@ -20649,13 +20868,13 @@
               </a:lnSpc>
             </a:pPr>
             <a:r>
-              <a:rPr sz="660">
+              <a:rPr sz="900" dirty="0">
                 <a:solidFill>
                   <a:srgbClr val="666666"/>
                 </a:solidFill>
                 <a:latin typeface="Outfit"/>
               </a:rPr>
-              <a:t>W / PBN-PG heater · SAG ≥930 °C on-wafer</a:t>
+              <a:t>PBN-PG heater </a:t>
             </a:r>
           </a:p>
         </p:txBody>
@@ -20668,7 +20887,7 @@
         </p:nvSpPr>
         <p:spPr>
           <a:xfrm>
-            <a:off x="612648" y="2834640"/>
+            <a:off x="611187" y="2673794"/>
             <a:ext cx="2514600" cy="512064"/>
           </a:xfrm>
           <a:prstGeom prst="roundRect">
@@ -20703,6 +20922,7 @@
           <a:lstStyle/>
           <a:p>
             <a:pPr algn="ctr"/>
+            <a:endParaRPr/>
           </a:p>
         </p:txBody>
       </p:sp>
@@ -20715,14 +20935,14 @@
           <p:nvPr/>
         </p:nvPicPr>
         <p:blipFill>
-          <a:blip r:embed="rId11"/>
+          <a:blip r:embed="rId7"/>
           <a:stretch>
             <a:fillRect/>
           </a:stretch>
         </p:blipFill>
         <p:spPr>
           <a:xfrm>
-            <a:off x="704088" y="2907792"/>
+            <a:off x="702627" y="2746946"/>
             <a:ext cx="365760" cy="365760"/>
           </a:xfrm>
           <a:prstGeom prst="rect">
@@ -20738,8 +20958,8 @@
         </p:nvSpPr>
         <p:spPr>
           <a:xfrm>
-            <a:off x="1161288" y="2907792"/>
-            <a:ext cx="1856232" cy="182880"/>
+            <a:off x="1159827" y="2746946"/>
+            <a:ext cx="1856232" cy="152799"/>
           </a:xfrm>
           <a:prstGeom prst="rect">
             <a:avLst/>
@@ -20747,7 +20967,7 @@
           <a:noFill/>
         </p:spPr>
         <p:txBody>
-          <a:bodyPr wrap="square" anchor="t" lIns="0" rIns="0" tIns="0" bIns="0">
+          <a:bodyPr wrap="square" lIns="0" tIns="0" rIns="0" bIns="0" anchor="t">
             <a:spAutoFit/>
           </a:bodyPr>
           <a:lstStyle/>
@@ -20758,11 +20978,11 @@
               </a:lnSpc>
             </a:pPr>
             <a:r>
-              <a:rPr sz="780">
+              <a:rPr sz="900" b="1" dirty="0">
                 <a:solidFill>
                   <a:srgbClr val="191919"/>
                 </a:solidFill>
-                <a:latin typeface="AvenirNext LT Pro Medium"/>
+                <a:latin typeface="Outfit" pitchFamily="2" charset="0"/>
               </a:rPr>
               <a:t>Effusion cells ×6</a:t>
             </a:r>
@@ -20777,8 +20997,8 @@
         </p:nvSpPr>
         <p:spPr>
           <a:xfrm>
-            <a:off x="1161288" y="3090672"/>
-            <a:ext cx="1856232" cy="201168"/>
+            <a:off x="1159827" y="2929826"/>
+            <a:ext cx="1856232" cy="144976"/>
           </a:xfrm>
           <a:prstGeom prst="rect">
             <a:avLst/>
@@ -20786,7 +21006,7 @@
           <a:noFill/>
         </p:spPr>
         <p:txBody>
-          <a:bodyPr wrap="square" anchor="t" lIns="0" rIns="0" tIns="0" bIns="0">
+          <a:bodyPr wrap="square" lIns="0" tIns="0" rIns="0" bIns="0" anchor="t">
             <a:spAutoFit/>
           </a:bodyPr>
           <a:lstStyle/>
@@ -20797,7 +21017,7 @@
               </a:lnSpc>
             </a:pPr>
             <a:r>
-              <a:rPr sz="660">
+              <a:rPr sz="900" dirty="0">
                 <a:solidFill>
                   <a:srgbClr val="666666"/>
                 </a:solidFill>
@@ -20816,7 +21036,7 @@
         </p:nvSpPr>
         <p:spPr>
           <a:xfrm>
-            <a:off x="3310128" y="2834640"/>
+            <a:off x="3308667" y="2673794"/>
             <a:ext cx="2514600" cy="512064"/>
           </a:xfrm>
           <a:prstGeom prst="roundRect">
@@ -20851,6 +21071,7 @@
           <a:lstStyle/>
           <a:p>
             <a:pPr algn="ctr"/>
+            <a:endParaRPr/>
           </a:p>
         </p:txBody>
       </p:sp>
@@ -20863,14 +21084,14 @@
           <p:nvPr/>
         </p:nvPicPr>
         <p:blipFill>
-          <a:blip r:embed="rId12"/>
+          <a:blip r:embed="rId8"/>
           <a:stretch>
             <a:fillRect/>
           </a:stretch>
         </p:blipFill>
         <p:spPr>
           <a:xfrm>
-            <a:off x="3401568" y="2907792"/>
+            <a:off x="3400107" y="2746946"/>
             <a:ext cx="365760" cy="365760"/>
           </a:xfrm>
           <a:prstGeom prst="rect">
@@ -20886,8 +21107,8 @@
         </p:nvSpPr>
         <p:spPr>
           <a:xfrm>
-            <a:off x="3858768" y="2907792"/>
-            <a:ext cx="1856232" cy="182880"/>
+            <a:off x="3857307" y="2746946"/>
+            <a:ext cx="1856232" cy="155107"/>
           </a:xfrm>
           <a:prstGeom prst="rect">
             <a:avLst/>
@@ -20895,7 +21116,7 @@
           <a:noFill/>
         </p:spPr>
         <p:txBody>
-          <a:bodyPr wrap="square" anchor="t" lIns="0" rIns="0" tIns="0" bIns="0">
+          <a:bodyPr wrap="square" lIns="0" tIns="0" rIns="0" bIns="0" anchor="t">
             <a:spAutoFit/>
           </a:bodyPr>
           <a:lstStyle/>
@@ -20906,13 +21127,31 @@
               </a:lnSpc>
             </a:pPr>
             <a:r>
-              <a:rPr sz="780">
+              <a:rPr sz="900" b="1" dirty="0">
                 <a:solidFill>
                   <a:srgbClr val="191919"/>
                 </a:solidFill>
-                <a:latin typeface="AvenirNext LT Pro Medium"/>
+                <a:latin typeface="Outfit" pitchFamily="2" charset="0"/>
               </a:rPr>
-              <a:t>Maglev turbopump</a:t>
+              <a:t>Maglev turbo</a:t>
+            </a:r>
+            <a:r>
+              <a:rPr lang="en-HK" sz="900" b="1" dirty="0">
+                <a:solidFill>
+                  <a:srgbClr val="191919"/>
+                </a:solidFill>
+                <a:latin typeface="Outfit" pitchFamily="2" charset="0"/>
+              </a:rPr>
+              <a:t>molecular</a:t>
+            </a:r>
+            <a:r>
+              <a:rPr sz="900" b="1" dirty="0">
+                <a:solidFill>
+                  <a:srgbClr val="191919"/>
+                </a:solidFill>
+                <a:latin typeface="Outfit" pitchFamily="2" charset="0"/>
+              </a:rPr>
+              <a:t>pump</a:t>
             </a:r>
           </a:p>
         </p:txBody>
@@ -20925,8 +21164,8 @@
         </p:nvSpPr>
         <p:spPr>
           <a:xfrm>
-            <a:off x="3858768" y="3090672"/>
-            <a:ext cx="1856232" cy="201168"/>
+            <a:off x="3857307" y="2929826"/>
+            <a:ext cx="1856232" cy="144463"/>
           </a:xfrm>
           <a:prstGeom prst="rect">
             <a:avLst/>
@@ -20934,7 +21173,7 @@
           <a:noFill/>
         </p:spPr>
         <p:txBody>
-          <a:bodyPr wrap="square" anchor="t" lIns="0" rIns="0" tIns="0" bIns="0">
+          <a:bodyPr wrap="square" lIns="0" tIns="0" rIns="0" bIns="0" anchor="t">
             <a:spAutoFit/>
           </a:bodyPr>
           <a:lstStyle/>
@@ -20945,7 +21184,7 @@
               </a:lnSpc>
             </a:pPr>
             <a:r>
-              <a:rPr sz="660">
+              <a:rPr sz="900" dirty="0">
                 <a:solidFill>
                   <a:srgbClr val="666666"/>
                 </a:solidFill>
@@ -20964,7 +21203,7 @@
         </p:nvSpPr>
         <p:spPr>
           <a:xfrm>
-            <a:off x="6007608" y="2834640"/>
+            <a:off x="6006147" y="2673794"/>
             <a:ext cx="2514600" cy="512064"/>
           </a:xfrm>
           <a:prstGeom prst="roundRect">
@@ -20999,6 +21238,7 @@
           <a:lstStyle/>
           <a:p>
             <a:pPr algn="ctr"/>
+            <a:endParaRPr/>
           </a:p>
         </p:txBody>
       </p:sp>
@@ -21011,14 +21251,14 @@
           <p:nvPr/>
         </p:nvPicPr>
         <p:blipFill>
-          <a:blip r:embed="rId13"/>
+          <a:blip r:embed="rId9"/>
           <a:stretch>
             <a:fillRect/>
           </a:stretch>
         </p:blipFill>
         <p:spPr>
           <a:xfrm>
-            <a:off x="6099048" y="2907792"/>
+            <a:off x="6097587" y="2746946"/>
             <a:ext cx="365760" cy="365760"/>
           </a:xfrm>
           <a:prstGeom prst="rect">
@@ -21034,8 +21274,8 @@
         </p:nvSpPr>
         <p:spPr>
           <a:xfrm>
-            <a:off x="6556248" y="2907792"/>
-            <a:ext cx="1856232" cy="182880"/>
+            <a:off x="6554787" y="2671321"/>
+            <a:ext cx="1866838" cy="319446"/>
           </a:xfrm>
           <a:prstGeom prst="rect">
             <a:avLst/>
@@ -21043,7 +21283,7 @@
           <a:noFill/>
         </p:spPr>
         <p:txBody>
-          <a:bodyPr wrap="square" anchor="t" lIns="0" rIns="0" tIns="0" bIns="0">
+          <a:bodyPr wrap="square" lIns="0" tIns="0" rIns="0" bIns="0" anchor="t">
             <a:spAutoFit/>
           </a:bodyPr>
           <a:lstStyle/>
@@ -21054,14 +21294,29 @@
               </a:lnSpc>
             </a:pPr>
             <a:r>
-              <a:rPr sz="780">
+              <a:rPr sz="900" b="1" dirty="0">
                 <a:solidFill>
                   <a:srgbClr val="191919"/>
                 </a:solidFill>
-                <a:latin typeface="AvenirNext LT Pro Medium"/>
+                <a:latin typeface="Outfit" pitchFamily="2" charset="0"/>
               </a:rPr>
-              <a:t>Ion pump + TSP</a:t>
-            </a:r>
+              <a:t>Ion pump + </a:t>
+            </a:r>
+            <a:r>
+              <a:rPr lang="en-HK" sz="900" b="1" dirty="0">
+                <a:solidFill>
+                  <a:srgbClr val="191919"/>
+                </a:solidFill>
+                <a:latin typeface="Outfit" pitchFamily="2" charset="0"/>
+              </a:rPr>
+              <a:t>Titanium sublimation pump</a:t>
+            </a:r>
+            <a:endParaRPr sz="900" b="1" dirty="0">
+              <a:solidFill>
+                <a:srgbClr val="191919"/>
+              </a:solidFill>
+              <a:latin typeface="Outfit" pitchFamily="2" charset="0"/>
+            </a:endParaRPr>
           </a:p>
         </p:txBody>
       </p:sp>
@@ -21073,8 +21328,8 @@
         </p:nvSpPr>
         <p:spPr>
           <a:xfrm>
-            <a:off x="6556248" y="3090672"/>
-            <a:ext cx="1856232" cy="201168"/>
+            <a:off x="6554787" y="2991497"/>
+            <a:ext cx="1856232" cy="144976"/>
           </a:xfrm>
           <a:prstGeom prst="rect">
             <a:avLst/>
@@ -21082,7 +21337,7 @@
           <a:noFill/>
         </p:spPr>
         <p:txBody>
-          <a:bodyPr wrap="square" anchor="t" lIns="0" rIns="0" tIns="0" bIns="0">
+          <a:bodyPr wrap="square" lIns="0" tIns="0" rIns="0" bIns="0" anchor="t">
             <a:spAutoFit/>
           </a:bodyPr>
           <a:lstStyle/>
@@ -21093,13 +21348,40 @@
               </a:lnSpc>
             </a:pPr>
             <a:r>
-              <a:rPr sz="660">
+              <a:rPr lang="en-HK" sz="900" dirty="0">
                 <a:solidFill>
                   <a:srgbClr val="666666"/>
                 </a:solidFill>
                 <a:latin typeface="Outfit"/>
               </a:rPr>
-              <a:t>valved · idle / base-pressure duty only</a:t>
+              <a:t>V</a:t>
+            </a:r>
+            <a:r>
+              <a:rPr sz="900" dirty="0" err="1">
+                <a:solidFill>
+                  <a:srgbClr val="666666"/>
+                </a:solidFill>
+                <a:latin typeface="Outfit"/>
+              </a:rPr>
+              <a:t>alved</a:t>
+            </a:r>
+            <a:r>
+              <a:rPr lang="en-HK" sz="900" dirty="0">
+                <a:solidFill>
+                  <a:srgbClr val="666666"/>
+                </a:solidFill>
+                <a:latin typeface="Outfit"/>
+              </a:rPr>
+              <a:t>: </a:t>
+            </a:r>
+            <a:r>
+              <a:rPr sz="900" dirty="0">
+                <a:solidFill>
+                  <a:srgbClr val="666666"/>
+                </a:solidFill>
+                <a:latin typeface="Outfit"/>
+              </a:rPr>
+              <a:t>base-pressure duty only</a:t>
             </a:r>
           </a:p>
         </p:txBody>
@@ -21112,7 +21394,7 @@
         </p:nvSpPr>
         <p:spPr>
           <a:xfrm>
-            <a:off x="612648" y="3419856"/>
+            <a:off x="611187" y="3259010"/>
             <a:ext cx="2514600" cy="512064"/>
           </a:xfrm>
           <a:prstGeom prst="roundRect">
@@ -21147,6 +21429,7 @@
           <a:lstStyle/>
           <a:p>
             <a:pPr algn="ctr"/>
+            <a:endParaRPr/>
           </a:p>
         </p:txBody>
       </p:sp>
@@ -21159,14 +21442,14 @@
           <p:nvPr/>
         </p:nvPicPr>
         <p:blipFill>
-          <a:blip r:embed="rId14"/>
+          <a:blip r:embed="rId10"/>
           <a:stretch>
             <a:fillRect/>
           </a:stretch>
         </p:blipFill>
         <p:spPr>
           <a:xfrm>
-            <a:off x="704088" y="3493008"/>
+            <a:off x="702627" y="3332162"/>
             <a:ext cx="365760" cy="365760"/>
           </a:xfrm>
           <a:prstGeom prst="rect">
@@ -21182,8 +21465,8 @@
         </p:nvSpPr>
         <p:spPr>
           <a:xfrm>
-            <a:off x="1161288" y="3493008"/>
-            <a:ext cx="1856232" cy="182880"/>
+            <a:off x="1159827" y="3332162"/>
+            <a:ext cx="1856232" cy="153247"/>
           </a:xfrm>
           <a:prstGeom prst="rect">
             <a:avLst/>
@@ -21191,7 +21474,7 @@
           <a:noFill/>
         </p:spPr>
         <p:txBody>
-          <a:bodyPr wrap="square" anchor="t" lIns="0" rIns="0" tIns="0" bIns="0">
+          <a:bodyPr wrap="square" lIns="0" tIns="0" rIns="0" bIns="0" anchor="t">
             <a:spAutoFit/>
           </a:bodyPr>
           <a:lstStyle/>
@@ -21202,13 +21485,13 @@
               </a:lnSpc>
             </a:pPr>
             <a:r>
-              <a:rPr sz="780">
+              <a:rPr sz="900" b="1" dirty="0">
                 <a:solidFill>
                   <a:srgbClr val="191919"/>
                 </a:solidFill>
-                <a:latin typeface="AvenirNext LT Pro Medium"/>
+                <a:latin typeface="Outfit" pitchFamily="2" charset="0"/>
               </a:rPr>
-              <a:t>RHEED 30 keV</a:t>
+              <a:t>RHEED</a:t>
             </a:r>
           </a:p>
         </p:txBody>
@@ -21221,8 +21504,8 @@
         </p:nvSpPr>
         <p:spPr>
           <a:xfrm>
-            <a:off x="1161288" y="3675888"/>
-            <a:ext cx="1856232" cy="201168"/>
+            <a:off x="1159827" y="3515042"/>
+            <a:ext cx="1856232" cy="144976"/>
           </a:xfrm>
           <a:prstGeom prst="rect">
             <a:avLst/>
@@ -21230,7 +21513,7 @@
           <a:noFill/>
         </p:spPr>
         <p:txBody>
-          <a:bodyPr wrap="square" anchor="t" lIns="0" rIns="0" tIns="0" bIns="0">
+          <a:bodyPr wrap="square" lIns="0" tIns="0" rIns="0" bIns="0" anchor="t">
             <a:spAutoFit/>
           </a:bodyPr>
           <a:lstStyle/>
@@ -21241,13 +21524,13 @@
               </a:lnSpc>
             </a:pPr>
             <a:r>
-              <a:rPr sz="660">
+              <a:rPr sz="900" dirty="0">
                 <a:solidFill>
                   <a:srgbClr val="666666"/>
                 </a:solidFill>
                 <a:latin typeface="Outfit"/>
               </a:rPr>
-              <a:t>gun · phosphor screen · camera for CV/ML</a:t>
+              <a:t>gun · phosphor screen · camera</a:t>
             </a:r>
           </a:p>
         </p:txBody>
@@ -21260,7 +21543,7 @@
         </p:nvSpPr>
         <p:spPr>
           <a:xfrm>
-            <a:off x="3310128" y="3419856"/>
+            <a:off x="3308667" y="3259010"/>
             <a:ext cx="2514600" cy="512064"/>
           </a:xfrm>
           <a:prstGeom prst="roundRect">
@@ -21295,6 +21578,7 @@
           <a:lstStyle/>
           <a:p>
             <a:pPr algn="ctr"/>
+            <a:endParaRPr/>
           </a:p>
         </p:txBody>
       </p:sp>
@@ -21307,14 +21591,14 @@
           <p:nvPr/>
         </p:nvPicPr>
         <p:blipFill>
-          <a:blip r:embed="rId15"/>
+          <a:blip r:embed="rId11"/>
           <a:stretch>
             <a:fillRect/>
           </a:stretch>
         </p:blipFill>
         <p:spPr>
           <a:xfrm>
-            <a:off x="3401568" y="3493008"/>
+            <a:off x="3400107" y="3332162"/>
             <a:ext cx="365760" cy="365760"/>
           </a:xfrm>
           <a:prstGeom prst="rect">
@@ -21330,8 +21614,8 @@
         </p:nvSpPr>
         <p:spPr>
           <a:xfrm>
-            <a:off x="3858768" y="3493008"/>
-            <a:ext cx="1856232" cy="182880"/>
+            <a:off x="3857307" y="3332162"/>
+            <a:ext cx="1856232" cy="155107"/>
           </a:xfrm>
           <a:prstGeom prst="rect">
             <a:avLst/>
@@ -21339,7 +21623,7 @@
           <a:noFill/>
         </p:spPr>
         <p:txBody>
-          <a:bodyPr wrap="square" anchor="t" lIns="0" rIns="0" tIns="0" bIns="0">
+          <a:bodyPr wrap="square" lIns="0" tIns="0" rIns="0" bIns="0" anchor="t">
             <a:spAutoFit/>
           </a:bodyPr>
           <a:lstStyle/>
@@ -21350,11 +21634,11 @@
               </a:lnSpc>
             </a:pPr>
             <a:r>
-              <a:rPr sz="780">
+              <a:rPr sz="900" b="1" dirty="0">
                 <a:solidFill>
                   <a:srgbClr val="191919"/>
                 </a:solidFill>
-                <a:latin typeface="AvenirNext LT Pro Medium"/>
+                <a:latin typeface="Outfit" pitchFamily="2" charset="0"/>
               </a:rPr>
               <a:t>Band-edge pyrometer</a:t>
             </a:r>
@@ -21369,8 +21653,8 @@
         </p:nvSpPr>
         <p:spPr>
           <a:xfrm>
-            <a:off x="3858768" y="3675888"/>
-            <a:ext cx="1856232" cy="201168"/>
+            <a:off x="3857307" y="3515042"/>
+            <a:ext cx="1856232" cy="144976"/>
           </a:xfrm>
           <a:prstGeom prst="rect">
             <a:avLst/>
@@ -21378,7 +21662,7 @@
           <a:noFill/>
         </p:spPr>
         <p:txBody>
-          <a:bodyPr wrap="square" anchor="t" lIns="0" rIns="0" tIns="0" bIns="0">
+          <a:bodyPr wrap="square" lIns="0" tIns="0" rIns="0" bIns="0" anchor="t">
             <a:spAutoFit/>
           </a:bodyPr>
           <a:lstStyle/>
@@ -21389,14 +21673,29 @@
               </a:lnSpc>
             </a:pPr>
             <a:r>
-              <a:rPr sz="660">
+              <a:rPr sz="900" dirty="0">
                 <a:solidFill>
                   <a:srgbClr val="666666"/>
                 </a:solidFill>
                 <a:latin typeface="Outfit"/>
               </a:rPr>
-              <a:t>true wafer T on transparent GaN / AlN</a:t>
-            </a:r>
+              <a:t>true wafer </a:t>
+            </a:r>
+            <a:r>
+              <a:rPr lang="en-HK" sz="900" dirty="0">
+                <a:solidFill>
+                  <a:srgbClr val="666666"/>
+                </a:solidFill>
+                <a:latin typeface="Outfit"/>
+              </a:rPr>
+              <a:t>temperature reading</a:t>
+            </a:r>
+            <a:endParaRPr sz="900" dirty="0">
+              <a:solidFill>
+                <a:srgbClr val="666666"/>
+              </a:solidFill>
+              <a:latin typeface="Outfit"/>
+            </a:endParaRPr>
           </a:p>
         </p:txBody>
       </p:sp>
@@ -21408,7 +21707,7 @@
         </p:nvSpPr>
         <p:spPr>
           <a:xfrm>
-            <a:off x="6007608" y="3419856"/>
+            <a:off x="6006147" y="3259010"/>
             <a:ext cx="2514600" cy="512064"/>
           </a:xfrm>
           <a:prstGeom prst="roundRect">
@@ -21443,6 +21742,7 @@
           <a:lstStyle/>
           <a:p>
             <a:pPr algn="ctr"/>
+            <a:endParaRPr/>
           </a:p>
         </p:txBody>
       </p:sp>
@@ -21455,14 +21755,14 @@
           <p:nvPr/>
         </p:nvPicPr>
         <p:blipFill>
-          <a:blip r:embed="rId16"/>
+          <a:blip r:embed="rId12"/>
           <a:stretch>
             <a:fillRect/>
           </a:stretch>
         </p:blipFill>
         <p:spPr>
           <a:xfrm>
-            <a:off x="6099048" y="3493008"/>
+            <a:off x="6097587" y="3332162"/>
             <a:ext cx="365760" cy="365760"/>
           </a:xfrm>
           <a:prstGeom prst="rect">
@@ -21478,8 +21778,8 @@
         </p:nvSpPr>
         <p:spPr>
           <a:xfrm>
-            <a:off x="6556248" y="3493008"/>
-            <a:ext cx="1856232" cy="182880"/>
+            <a:off x="6554787" y="3332162"/>
+            <a:ext cx="1856232" cy="155107"/>
           </a:xfrm>
           <a:prstGeom prst="rect">
             <a:avLst/>
@@ -21487,7 +21787,7 @@
           <a:noFill/>
         </p:spPr>
         <p:txBody>
-          <a:bodyPr wrap="square" anchor="t" lIns="0" rIns="0" tIns="0" bIns="0">
+          <a:bodyPr wrap="square" lIns="0" tIns="0" rIns="0" bIns="0" anchor="t">
             <a:spAutoFit/>
           </a:bodyPr>
           <a:lstStyle/>
@@ -21498,13 +21798,49 @@
               </a:lnSpc>
             </a:pPr>
             <a:r>
-              <a:rPr sz="780">
+              <a:rPr sz="900" b="1" dirty="0">
                 <a:solidFill>
                   <a:srgbClr val="191919"/>
                 </a:solidFill>
-                <a:latin typeface="AvenirNext LT Pro Medium"/>
+                <a:latin typeface="Outfit" pitchFamily="2" charset="0"/>
               </a:rPr>
-              <a:t>RGA + ion gauges</a:t>
+              <a:t>R</a:t>
+            </a:r>
+            <a:r>
+              <a:rPr lang="en-HK" sz="900" b="1" dirty="0" err="1">
+                <a:solidFill>
+                  <a:srgbClr val="191919"/>
+                </a:solidFill>
+                <a:latin typeface="Outfit" pitchFamily="2" charset="0"/>
+              </a:rPr>
+              <a:t>esidual</a:t>
+            </a:r>
+            <a:r>
+              <a:rPr lang="en-HK" sz="900" b="1" dirty="0">
+                <a:solidFill>
+                  <a:srgbClr val="191919"/>
+                </a:solidFill>
+                <a:latin typeface="Outfit" pitchFamily="2" charset="0"/>
+              </a:rPr>
+              <a:t> gas </a:t>
+            </a:r>
+            <a:r>
+              <a:rPr lang="en-HK" sz="900" b="1" dirty="0" err="1">
+                <a:solidFill>
+                  <a:srgbClr val="191919"/>
+                </a:solidFill>
+                <a:latin typeface="Outfit" pitchFamily="2" charset="0"/>
+              </a:rPr>
+              <a:t>analyzer</a:t>
+            </a:r>
+            <a:r>
+              <a:rPr sz="900" b="1" dirty="0">
+                <a:solidFill>
+                  <a:srgbClr val="191919"/>
+                </a:solidFill>
+                <a:latin typeface="Outfit" pitchFamily="2" charset="0"/>
+              </a:rPr>
+              <a:t> + ion gauges</a:t>
             </a:r>
           </a:p>
         </p:txBody>
@@ -21517,8 +21853,8 @@
         </p:nvSpPr>
         <p:spPr>
           <a:xfrm>
-            <a:off x="6556248" y="3675888"/>
-            <a:ext cx="1856232" cy="201168"/>
+            <a:off x="6554787" y="3515042"/>
+            <a:ext cx="1856232" cy="144976"/>
           </a:xfrm>
           <a:prstGeom prst="rect">
             <a:avLst/>
@@ -21526,7 +21862,7 @@
           <a:noFill/>
         </p:spPr>
         <p:txBody>
-          <a:bodyPr wrap="square" anchor="t" lIns="0" rIns="0" tIns="0" bIns="0">
+          <a:bodyPr wrap="square" lIns="0" tIns="0" rIns="0" bIns="0" anchor="t">
             <a:spAutoFit/>
           </a:bodyPr>
           <a:lstStyle/>
@@ -21537,7 +21873,7 @@
               </a:lnSpc>
             </a:pPr>
             <a:r>
-              <a:rPr sz="660">
+              <a:rPr sz="900" dirty="0">
                 <a:solidFill>
                   <a:srgbClr val="666666"/>
                 </a:solidFill>
@@ -21556,8 +21892,8 @@
         </p:nvSpPr>
         <p:spPr>
           <a:xfrm>
-            <a:off x="612648" y="4005072"/>
-            <a:ext cx="2514600" cy="512064"/>
+            <a:off x="611187" y="3844226"/>
+            <a:ext cx="2514600" cy="770636"/>
           </a:xfrm>
           <a:prstGeom prst="roundRect">
             <a:avLst>
@@ -21591,6 +21927,7 @@
           <a:lstStyle/>
           <a:p>
             <a:pPr algn="ctr"/>
+            <a:endParaRPr/>
           </a:p>
         </p:txBody>
       </p:sp>
@@ -21603,14 +21940,14 @@
           <p:nvPr/>
         </p:nvPicPr>
         <p:blipFill>
-          <a:blip r:embed="rId17"/>
+          <a:blip r:embed="rId13"/>
           <a:stretch>
             <a:fillRect/>
           </a:stretch>
         </p:blipFill>
         <p:spPr>
           <a:xfrm>
-            <a:off x="704088" y="4078224"/>
+            <a:off x="702627" y="3917378"/>
             <a:ext cx="365760" cy="365760"/>
           </a:xfrm>
           <a:prstGeom prst="rect">
@@ -21626,8 +21963,8 @@
         </p:nvSpPr>
         <p:spPr>
           <a:xfrm>
-            <a:off x="1161288" y="4078224"/>
-            <a:ext cx="1856232" cy="182880"/>
+            <a:off x="1159827" y="3896753"/>
+            <a:ext cx="1856232" cy="319446"/>
           </a:xfrm>
           <a:prstGeom prst="rect">
             <a:avLst/>
@@ -21635,7 +21972,7 @@
           <a:noFill/>
         </p:spPr>
         <p:txBody>
-          <a:bodyPr wrap="square" anchor="t" lIns="0" rIns="0" tIns="0" bIns="0">
+          <a:bodyPr wrap="square" lIns="0" tIns="0" rIns="0" bIns="0" anchor="t">
             <a:spAutoFit/>
           </a:bodyPr>
           <a:lstStyle/>
@@ -21646,14 +21983,47 @@
               </a:lnSpc>
             </a:pPr>
             <a:r>
-              <a:rPr sz="780">
+              <a:rPr lang="en-HK" sz="900" b="1" dirty="0">
                 <a:solidFill>
                   <a:srgbClr val="191919"/>
                 </a:solidFill>
-                <a:latin typeface="AvenirNext LT Pro Medium"/>
+                <a:latin typeface="Outfit" pitchFamily="2" charset="0"/>
               </a:rPr>
-              <a:t>Cell PSUs + PID</a:t>
-            </a:r>
+              <a:t>Power supply </a:t>
+            </a:r>
+            <a:r>
+              <a:rPr sz="900" b="1" dirty="0">
+                <a:solidFill>
+                  <a:srgbClr val="191919"/>
+                </a:solidFill>
+                <a:latin typeface="Outfit" pitchFamily="2" charset="0"/>
+              </a:rPr>
+              <a:t>+ P</a:t>
+            </a:r>
+            <a:r>
+              <a:rPr lang="en-HK" sz="900" b="1" dirty="0" err="1">
+                <a:solidFill>
+                  <a:srgbClr val="191919"/>
+                </a:solidFill>
+                <a:latin typeface="Outfit" pitchFamily="2" charset="0"/>
+              </a:rPr>
+              <a:t>roportional</a:t>
+            </a:r>
+            <a:r>
+              <a:rPr lang="en-HK" sz="900" b="1" dirty="0">
+                <a:solidFill>
+                  <a:srgbClr val="191919"/>
+                </a:solidFill>
+                <a:latin typeface="Outfit" pitchFamily="2" charset="0"/>
+              </a:rPr>
+              <a:t> integral derivative</a:t>
+            </a:r>
+            <a:endParaRPr sz="900" b="1" dirty="0">
+              <a:solidFill>
+                <a:srgbClr val="191919"/>
+              </a:solidFill>
+              <a:latin typeface="Outfit" pitchFamily="2" charset="0"/>
+            </a:endParaRPr>
           </a:p>
         </p:txBody>
       </p:sp>
@@ -21665,8 +22035,8 @@
         </p:nvSpPr>
         <p:spPr>
           <a:xfrm>
-            <a:off x="1161288" y="4261104"/>
-            <a:ext cx="1856232" cy="201168"/>
+            <a:off x="1178115" y="4268726"/>
+            <a:ext cx="1856232" cy="300082"/>
           </a:xfrm>
           <a:prstGeom prst="rect">
             <a:avLst/>
@@ -21674,7 +22044,7 @@
           <a:noFill/>
         </p:spPr>
         <p:txBody>
-          <a:bodyPr wrap="square" anchor="t" lIns="0" rIns="0" tIns="0" bIns="0">
+          <a:bodyPr wrap="square" lIns="0" tIns="0" rIns="0" bIns="0" anchor="t">
             <a:spAutoFit/>
           </a:bodyPr>
           <a:lstStyle/>
@@ -21685,13 +22055,31 @@
               </a:lnSpc>
             </a:pPr>
             <a:r>
-              <a:rPr sz="660">
+              <a:rPr sz="900" dirty="0">
                 <a:solidFill>
                   <a:srgbClr val="666666"/>
                 </a:solidFill>
                 <a:latin typeface="Outfit"/>
               </a:rPr>
-              <a:t>one DC supply + loop per heater zone</a:t>
+              <a:t>one DC supply +</a:t>
+            </a:r>
+            <a:r>
+              <a:rPr lang="en-HK" sz="900" dirty="0">
+                <a:solidFill>
+                  <a:srgbClr val="666666"/>
+                </a:solidFill>
+                <a:latin typeface="Outfit"/>
+              </a:rPr>
+              <a:t> control</a:t>
+            </a:r>
+            <a:r>
+              <a:rPr sz="900" dirty="0">
+                <a:solidFill>
+                  <a:srgbClr val="666666"/>
+                </a:solidFill>
+                <a:latin typeface="Outfit"/>
+              </a:rPr>
+              <a:t> loop per heater zone</a:t>
             </a:r>
           </a:p>
         </p:txBody>
@@ -21704,8 +22092,8 @@
         </p:nvSpPr>
         <p:spPr>
           <a:xfrm>
-            <a:off x="3310128" y="4005072"/>
-            <a:ext cx="2514600" cy="512064"/>
+            <a:off x="3308667" y="3844225"/>
+            <a:ext cx="2514600" cy="770637"/>
           </a:xfrm>
           <a:prstGeom prst="roundRect">
             <a:avLst>
@@ -21739,6 +22127,7 @@
           <a:lstStyle/>
           <a:p>
             <a:pPr algn="ctr"/>
+            <a:endParaRPr/>
           </a:p>
         </p:txBody>
       </p:sp>
@@ -21751,14 +22140,14 @@
           <p:nvPr/>
         </p:nvPicPr>
         <p:blipFill>
-          <a:blip r:embed="rId18"/>
+          <a:blip r:embed="rId14"/>
           <a:stretch>
             <a:fillRect/>
           </a:stretch>
         </p:blipFill>
         <p:spPr>
           <a:xfrm>
-            <a:off x="3401568" y="4078224"/>
+            <a:off x="3400107" y="3917378"/>
             <a:ext cx="365760" cy="365760"/>
           </a:xfrm>
           <a:prstGeom prst="rect">
@@ -21774,8 +22163,8 @@
         </p:nvSpPr>
         <p:spPr>
           <a:xfrm>
-            <a:off x="3858768" y="4078224"/>
-            <a:ext cx="1856232" cy="182880"/>
+            <a:off x="3857307" y="3917378"/>
+            <a:ext cx="1856232" cy="155107"/>
           </a:xfrm>
           <a:prstGeom prst="rect">
             <a:avLst/>
@@ -21783,7 +22172,7 @@
           <a:noFill/>
         </p:spPr>
         <p:txBody>
-          <a:bodyPr wrap="square" anchor="t" lIns="0" rIns="0" tIns="0" bIns="0">
+          <a:bodyPr wrap="square" lIns="0" tIns="0" rIns="0" bIns="0" anchor="t">
             <a:spAutoFit/>
           </a:bodyPr>
           <a:lstStyle/>
@@ -21794,11 +22183,11 @@
               </a:lnSpc>
             </a:pPr>
             <a:r>
-              <a:rPr sz="780">
+              <a:rPr sz="900" b="1" dirty="0">
                 <a:solidFill>
                   <a:srgbClr val="191919"/>
                 </a:solidFill>
-                <a:latin typeface="AvenirNext LT Pro Medium"/>
+                <a:latin typeface="Outfit" pitchFamily="2" charset="0"/>
               </a:rPr>
               <a:t>LN₂ distribution</a:t>
             </a:r>
@@ -21813,8 +22202,8 @@
         </p:nvSpPr>
         <p:spPr>
           <a:xfrm>
-            <a:off x="3858768" y="4261104"/>
-            <a:ext cx="1856232" cy="201168"/>
+            <a:off x="3857307" y="4100258"/>
+            <a:ext cx="1856232" cy="300082"/>
           </a:xfrm>
           <a:prstGeom prst="rect">
             <a:avLst/>
@@ -21822,7 +22211,7 @@
           <a:noFill/>
         </p:spPr>
         <p:txBody>
-          <a:bodyPr wrap="square" anchor="t" lIns="0" rIns="0" tIns="0" bIns="0">
+          <a:bodyPr wrap="square" lIns="0" tIns="0" rIns="0" bIns="0" anchor="t">
             <a:spAutoFit/>
           </a:bodyPr>
           <a:lstStyle/>
@@ -21833,7 +22222,7 @@
               </a:lnSpc>
             </a:pPr>
             <a:r>
-              <a:rPr sz="660">
+              <a:rPr sz="900" dirty="0">
                 <a:solidFill>
                   <a:srgbClr val="666666"/>
                 </a:solidFill>
@@ -21852,8 +22241,8 @@
         </p:nvSpPr>
         <p:spPr>
           <a:xfrm>
-            <a:off x="6007608" y="4005072"/>
-            <a:ext cx="2514600" cy="512064"/>
+            <a:off x="6006147" y="3844225"/>
+            <a:ext cx="2514600" cy="770637"/>
           </a:xfrm>
           <a:prstGeom prst="roundRect">
             <a:avLst>
@@ -21887,6 +22276,7 @@
           <a:lstStyle/>
           <a:p>
             <a:pPr algn="ctr"/>
+            <a:endParaRPr/>
           </a:p>
         </p:txBody>
       </p:sp>
@@ -21899,14 +22289,14 @@
           <p:nvPr/>
         </p:nvPicPr>
         <p:blipFill>
-          <a:blip r:embed="rId19"/>
+          <a:blip r:embed="rId15"/>
           <a:stretch>
             <a:fillRect/>
           </a:stretch>
         </p:blipFill>
         <p:spPr>
           <a:xfrm>
-            <a:off x="6099048" y="4078224"/>
+            <a:off x="6097587" y="3917378"/>
             <a:ext cx="365760" cy="365760"/>
           </a:xfrm>
           <a:prstGeom prst="rect">
@@ -21922,8 +22312,8 @@
         </p:nvSpPr>
         <p:spPr>
           <a:xfrm>
-            <a:off x="6556248" y="4078224"/>
-            <a:ext cx="1856232" cy="182880"/>
+            <a:off x="6554787" y="3870644"/>
+            <a:ext cx="1856232" cy="485646"/>
           </a:xfrm>
           <a:prstGeom prst="rect">
             <a:avLst/>
@@ -21931,7 +22321,7 @@
           <a:noFill/>
         </p:spPr>
         <p:txBody>
-          <a:bodyPr wrap="square" anchor="t" lIns="0" rIns="0" tIns="0" bIns="0">
+          <a:bodyPr wrap="square" lIns="0" tIns="0" rIns="0" bIns="0" anchor="t">
             <a:spAutoFit/>
           </a:bodyPr>
           <a:lstStyle/>
@@ -21942,53 +22332,119 @@
               </a:lnSpc>
             </a:pPr>
             <a:r>
-              <a:rPr sz="780">
+              <a:rPr sz="900" b="1" dirty="0">
                 <a:solidFill>
                   <a:srgbClr val="191919"/>
                 </a:solidFill>
-                <a:latin typeface="AvenirNext LT Pro Medium"/>
+                <a:latin typeface="Outfit" pitchFamily="2" charset="0"/>
               </a:rPr>
-              <a:t>Bake-out · chiller · UPS</a:t>
-            </a:r>
-          </a:p>
-        </p:txBody>
-      </p:sp>
-      <p:sp>
-        <p:nvSpPr>
-          <p:cNvPr id="57" name="TextBox 56"/>
-          <p:cNvSpPr txBox="1"/>
-          <p:nvPr/>
-        </p:nvSpPr>
-        <p:spPr>
-          <a:xfrm>
-            <a:off x="6556248" y="4261104"/>
-            <a:ext cx="1856232" cy="201168"/>
-          </a:xfrm>
-          <a:prstGeom prst="rect">
-            <a:avLst/>
-          </a:prstGeom>
-          <a:noFill/>
-        </p:spPr>
-        <p:txBody>
-          <a:bodyPr wrap="square" anchor="t" lIns="0" rIns="0" tIns="0" bIns="0">
-            <a:spAutoFit/>
-          </a:bodyPr>
-          <a:lstStyle/>
-          <a:p>
-            <a:pPr algn="l">
-              <a:lnSpc>
-                <a:spcPct val="112000"/>
-              </a:lnSpc>
-            </a:pPr>
-            <a:r>
-              <a:rPr sz="660">
-                <a:solidFill>
-                  <a:srgbClr val="666666"/>
-                </a:solidFill>
-                <a:latin typeface="Outfit"/>
+              <a:t>Bake-out</a:t>
+            </a:r>
+            <a:r>
+              <a:rPr lang="en-HK" sz="900" b="1" dirty="0">
+                <a:solidFill>
+                  <a:srgbClr val="191919"/>
+                </a:solidFill>
+                <a:latin typeface="Outfit" pitchFamily="2" charset="0"/>
               </a:rPr>
-              <a:t>heaters · water loop · backup power</a:t>
-            </a:r>
+              <a:t> heater</a:t>
+            </a:r>
+            <a:r>
+              <a:rPr sz="900" b="1" dirty="0">
+                <a:solidFill>
+                  <a:srgbClr val="191919"/>
+                </a:solidFill>
+                <a:latin typeface="Outfit" pitchFamily="2" charset="0"/>
+              </a:rPr>
+              <a:t> · </a:t>
+            </a:r>
+            <a:r>
+              <a:rPr lang="en-HK" sz="900" b="1" dirty="0">
+                <a:solidFill>
+                  <a:srgbClr val="191919"/>
+                </a:solidFill>
+                <a:latin typeface="Outfit" pitchFamily="2" charset="0"/>
+              </a:rPr>
+              <a:t>water-loop </a:t>
+            </a:r>
+            <a:r>
+              <a:rPr sz="900" b="1" dirty="0">
+                <a:solidFill>
+                  <a:srgbClr val="191919"/>
+                </a:solidFill>
+                <a:latin typeface="Outfit" pitchFamily="2" charset="0"/>
+              </a:rPr>
+              <a:t>chiller · U</a:t>
+            </a:r>
+            <a:r>
+              <a:rPr lang="en-HK" sz="900" b="1" dirty="0" err="1">
+                <a:solidFill>
+                  <a:srgbClr val="191919"/>
+                </a:solidFill>
+                <a:latin typeface="Outfit" pitchFamily="2" charset="0"/>
+              </a:rPr>
+              <a:t>ninterruptible</a:t>
+            </a:r>
+            <a:r>
+              <a:rPr lang="en-HK" sz="900" b="1" dirty="0">
+                <a:solidFill>
+                  <a:srgbClr val="191919"/>
+                </a:solidFill>
+                <a:latin typeface="Outfit" pitchFamily="2" charset="0"/>
+              </a:rPr>
+              <a:t> </a:t>
+            </a:r>
+            <a:r>
+              <a:rPr sz="900" b="1" dirty="0">
+                <a:solidFill>
+                  <a:srgbClr val="191919"/>
+                </a:solidFill>
+                <a:latin typeface="Outfit" pitchFamily="2" charset="0"/>
+              </a:rPr>
+              <a:t>P</a:t>
+            </a:r>
+            <a:r>
+              <a:rPr lang="en-HK" sz="900" b="1" dirty="0" err="1">
+                <a:solidFill>
+                  <a:srgbClr val="191919"/>
+                </a:solidFill>
+                <a:latin typeface="Outfit" pitchFamily="2" charset="0"/>
+              </a:rPr>
+              <a:t>ower</a:t>
+            </a:r>
+            <a:r>
+              <a:rPr lang="en-HK" sz="900" b="1" dirty="0">
+                <a:solidFill>
+                  <a:srgbClr val="191919"/>
+                </a:solidFill>
+                <a:latin typeface="Outfit" pitchFamily="2" charset="0"/>
+              </a:rPr>
+              <a:t> </a:t>
+            </a:r>
+            <a:r>
+              <a:rPr sz="900" b="1" dirty="0">
+                <a:solidFill>
+                  <a:srgbClr val="191919"/>
+                </a:solidFill>
+                <a:latin typeface="Outfit" pitchFamily="2" charset="0"/>
+              </a:rPr>
+              <a:t>S</a:t>
+            </a:r>
+            <a:r>
+              <a:rPr lang="en-HK" sz="900" b="1" dirty="0" err="1">
+                <a:solidFill>
+                  <a:srgbClr val="191919"/>
+                </a:solidFill>
+                <a:latin typeface="Outfit" pitchFamily="2" charset="0"/>
+              </a:rPr>
+              <a:t>upply</a:t>
+            </a:r>
+            <a:endParaRPr sz="900" b="1" dirty="0">
+              <a:solidFill>
+                <a:srgbClr val="191919"/>
+              </a:solidFill>
+              <a:latin typeface="Outfit" pitchFamily="2" charset="0"/>
+            </a:endParaRPr>
           </a:p>
         </p:txBody>
       </p:sp>
@@ -22033,14 +22489,20 @@
           <a:lstStyle/>
           <a:p>
             <a:r>
-              <a:rPr sz="2200" spc="20" dirty="0">
+              <a:rPr lang="en-HK" sz="2200" spc="20" dirty="0">
                 <a:solidFill>
                   <a:srgbClr val="00B388"/>
                 </a:solidFill>
                 <a:latin typeface="AvenirNext LT Pro Light"/>
               </a:rPr>
-              <a:t>US$0.9–1.5M all-in</a:t>
-            </a:r>
+              <a:t>Cost Estimate</a:t>
+            </a:r>
+            <a:endParaRPr sz="2200" spc="20" dirty="0">
+              <a:solidFill>
+                <a:srgbClr val="00B388"/>
+              </a:solidFill>
+              <a:latin typeface="AvenirNext LT Pro Light"/>
+            </a:endParaRPr>
           </a:p>
         </p:txBody>
       </p:sp>
@@ -22114,6 +22576,7 @@
           <a:lstStyle/>
           <a:p>
             <a:pPr algn="ctr"/>
+            <a:endParaRPr/>
           </a:p>
         </p:txBody>
       </p:sp>
@@ -22154,7 +22617,7 @@
           </a:fontRef>
         </p:style>
         <p:txBody>
-          <a:bodyPr rtlCol="0" anchor="ctr" lIns="0" rIns="0" tIns="0" bIns="0"/>
+          <a:bodyPr lIns="0" tIns="0" rIns="0" bIns="0" rtlCol="0" anchor="ctr"/>
           <a:lstStyle/>
           <a:p>
             <a:pPr algn="ctr"/>
@@ -22187,7 +22650,7 @@
           <a:noFill/>
         </p:spPr>
         <p:txBody>
-          <a:bodyPr wrap="square" anchor="ctr" lIns="0" rIns="0" tIns="0" bIns="0">
+          <a:bodyPr wrap="square" lIns="0" tIns="0" rIns="0" bIns="0" anchor="ctr">
             <a:spAutoFit/>
           </a:bodyPr>
           <a:lstStyle/>
@@ -22226,7 +22689,7 @@
           <a:noFill/>
         </p:spPr>
         <p:txBody>
-          <a:bodyPr wrap="square" anchor="ctr" lIns="0" rIns="0" tIns="0" bIns="0">
+          <a:bodyPr wrap="square" lIns="0" tIns="0" rIns="0" bIns="0" anchor="ctr">
             <a:spAutoFit/>
           </a:bodyPr>
           <a:lstStyle/>
@@ -22265,7 +22728,7 @@
           <a:noFill/>
         </p:spPr>
         <p:txBody>
-          <a:bodyPr wrap="square" anchor="ctr" lIns="0" rIns="0" tIns="0" bIns="0">
+          <a:bodyPr wrap="square" lIns="0" tIns="0" rIns="0" bIns="0" anchor="ctr">
             <a:spAutoFit/>
           </a:bodyPr>
           <a:lstStyle/>
@@ -22330,6 +22793,7 @@
           <a:lstStyle/>
           <a:p>
             <a:pPr algn="ctr"/>
+            <a:endParaRPr/>
           </a:p>
         </p:txBody>
       </p:sp>
@@ -22370,7 +22834,7 @@
           </a:fontRef>
         </p:style>
         <p:txBody>
-          <a:bodyPr rtlCol="0" anchor="ctr" lIns="0" rIns="0" tIns="0" bIns="0"/>
+          <a:bodyPr lIns="0" tIns="0" rIns="0" bIns="0" rtlCol="0" anchor="ctr"/>
           <a:lstStyle/>
           <a:p>
             <a:pPr algn="ctr"/>
@@ -22403,7 +22867,7 @@
           <a:noFill/>
         </p:spPr>
         <p:txBody>
-          <a:bodyPr wrap="square" anchor="ctr" lIns="0" rIns="0" tIns="0" bIns="0">
+          <a:bodyPr wrap="square" lIns="0" tIns="0" rIns="0" bIns="0" anchor="ctr">
             <a:spAutoFit/>
           </a:bodyPr>
           <a:lstStyle/>
@@ -22442,7 +22906,7 @@
           <a:noFill/>
         </p:spPr>
         <p:txBody>
-          <a:bodyPr wrap="square" anchor="ctr" lIns="0" rIns="0" tIns="0" bIns="0">
+          <a:bodyPr wrap="square" lIns="0" tIns="0" rIns="0" bIns="0" anchor="ctr">
             <a:spAutoFit/>
           </a:bodyPr>
           <a:lstStyle/>
@@ -22481,7 +22945,7 @@
           <a:noFill/>
         </p:spPr>
         <p:txBody>
-          <a:bodyPr wrap="square" anchor="ctr" lIns="0" rIns="0" tIns="0" bIns="0">
+          <a:bodyPr wrap="square" lIns="0" tIns="0" rIns="0" bIns="0" anchor="ctr">
             <a:spAutoFit/>
           </a:bodyPr>
           <a:lstStyle/>
@@ -22546,6 +23010,7 @@
           <a:lstStyle/>
           <a:p>
             <a:pPr algn="ctr"/>
+            <a:endParaRPr/>
           </a:p>
         </p:txBody>
       </p:sp>
@@ -22586,7 +23051,7 @@
           </a:fontRef>
         </p:style>
         <p:txBody>
-          <a:bodyPr rtlCol="0" anchor="ctr" lIns="0" rIns="0" tIns="0" bIns="0"/>
+          <a:bodyPr lIns="0" tIns="0" rIns="0" bIns="0" rtlCol="0" anchor="ctr"/>
           <a:lstStyle/>
           <a:p>
             <a:pPr algn="ctr"/>
@@ -22619,7 +23084,7 @@
           <a:noFill/>
         </p:spPr>
         <p:txBody>
-          <a:bodyPr wrap="square" anchor="ctr" lIns="0" rIns="0" tIns="0" bIns="0">
+          <a:bodyPr wrap="square" lIns="0" tIns="0" rIns="0" bIns="0" anchor="ctr">
             <a:spAutoFit/>
           </a:bodyPr>
           <a:lstStyle/>
@@ -22658,7 +23123,7 @@
           <a:noFill/>
         </p:spPr>
         <p:txBody>
-          <a:bodyPr wrap="square" anchor="ctr" lIns="0" rIns="0" tIns="0" bIns="0">
+          <a:bodyPr wrap="square" lIns="0" tIns="0" rIns="0" bIns="0" anchor="ctr">
             <a:spAutoFit/>
           </a:bodyPr>
           <a:lstStyle/>
@@ -22697,7 +23162,7 @@
           <a:noFill/>
         </p:spPr>
         <p:txBody>
-          <a:bodyPr wrap="square" anchor="ctr" lIns="0" rIns="0" tIns="0" bIns="0">
+          <a:bodyPr wrap="square" lIns="0" tIns="0" rIns="0" bIns="0" anchor="ctr">
             <a:spAutoFit/>
           </a:bodyPr>
           <a:lstStyle/>
@@ -22762,6 +23227,7 @@
           <a:lstStyle/>
           <a:p>
             <a:pPr algn="ctr"/>
+            <a:endParaRPr/>
           </a:p>
         </p:txBody>
       </p:sp>
@@ -22802,7 +23268,7 @@
           </a:fontRef>
         </p:style>
         <p:txBody>
-          <a:bodyPr rtlCol="0" anchor="ctr" lIns="0" rIns="0" tIns="0" bIns="0"/>
+          <a:bodyPr lIns="0" tIns="0" rIns="0" bIns="0" rtlCol="0" anchor="ctr"/>
           <a:lstStyle/>
           <a:p>
             <a:pPr algn="ctr"/>
@@ -22835,7 +23301,7 @@
           <a:noFill/>
         </p:spPr>
         <p:txBody>
-          <a:bodyPr wrap="square" anchor="ctr" lIns="0" rIns="0" tIns="0" bIns="0">
+          <a:bodyPr wrap="square" lIns="0" tIns="0" rIns="0" bIns="0" anchor="ctr">
             <a:spAutoFit/>
           </a:bodyPr>
           <a:lstStyle/>
@@ -22874,7 +23340,7 @@
           <a:noFill/>
         </p:spPr>
         <p:txBody>
-          <a:bodyPr wrap="square" anchor="ctr" lIns="0" rIns="0" tIns="0" bIns="0">
+          <a:bodyPr wrap="square" lIns="0" tIns="0" rIns="0" bIns="0" anchor="ctr">
             <a:spAutoFit/>
           </a:bodyPr>
           <a:lstStyle/>
@@ -22913,7 +23379,7 @@
           <a:noFill/>
         </p:spPr>
         <p:txBody>
-          <a:bodyPr wrap="square" anchor="ctr" lIns="0" rIns="0" tIns="0" bIns="0">
+          <a:bodyPr wrap="square" lIns="0" tIns="0" rIns="0" bIns="0" anchor="ctr">
             <a:spAutoFit/>
           </a:bodyPr>
           <a:lstStyle/>
@@ -22978,6 +23444,7 @@
           <a:lstStyle/>
           <a:p>
             <a:pPr algn="ctr"/>
+            <a:endParaRPr/>
           </a:p>
         </p:txBody>
       </p:sp>
@@ -23018,7 +23485,7 @@
           </a:fontRef>
         </p:style>
         <p:txBody>
-          <a:bodyPr rtlCol="0" anchor="ctr" lIns="0" rIns="0" tIns="0" bIns="0"/>
+          <a:bodyPr lIns="0" tIns="0" rIns="0" bIns="0" rtlCol="0" anchor="ctr"/>
           <a:lstStyle/>
           <a:p>
             <a:pPr algn="ctr"/>
@@ -23051,7 +23518,7 @@
           <a:noFill/>
         </p:spPr>
         <p:txBody>
-          <a:bodyPr wrap="square" anchor="ctr" lIns="0" rIns="0" tIns="0" bIns="0">
+          <a:bodyPr wrap="square" lIns="0" tIns="0" rIns="0" bIns="0" anchor="ctr">
             <a:spAutoFit/>
           </a:bodyPr>
           <a:lstStyle/>
@@ -23090,7 +23557,7 @@
           <a:noFill/>
         </p:spPr>
         <p:txBody>
-          <a:bodyPr wrap="square" anchor="ctr" lIns="0" rIns="0" tIns="0" bIns="0">
+          <a:bodyPr wrap="square" lIns="0" tIns="0" rIns="0" bIns="0" anchor="ctr">
             <a:spAutoFit/>
           </a:bodyPr>
           <a:lstStyle/>
@@ -23129,7 +23596,7 @@
           <a:noFill/>
         </p:spPr>
         <p:txBody>
-          <a:bodyPr wrap="square" anchor="ctr" lIns="0" rIns="0" tIns="0" bIns="0">
+          <a:bodyPr wrap="square" lIns="0" tIns="0" rIns="0" bIns="0" anchor="ctr">
             <a:spAutoFit/>
           </a:bodyPr>
           <a:lstStyle/>
@@ -23194,6 +23661,7 @@
           <a:lstStyle/>
           <a:p>
             <a:pPr algn="ctr"/>
+            <a:endParaRPr/>
           </a:p>
         </p:txBody>
       </p:sp>
@@ -23234,7 +23702,7 @@
           </a:fontRef>
         </p:style>
         <p:txBody>
-          <a:bodyPr rtlCol="0" anchor="ctr" lIns="0" rIns="0" tIns="0" bIns="0"/>
+          <a:bodyPr lIns="0" tIns="0" rIns="0" bIns="0" rtlCol="0" anchor="ctr"/>
           <a:lstStyle/>
           <a:p>
             <a:pPr algn="ctr"/>
@@ -23267,7 +23735,7 @@
           <a:noFill/>
         </p:spPr>
         <p:txBody>
-          <a:bodyPr wrap="square" anchor="ctr" lIns="0" rIns="0" tIns="0" bIns="0">
+          <a:bodyPr wrap="square" lIns="0" tIns="0" rIns="0" bIns="0" anchor="ctr">
             <a:spAutoFit/>
           </a:bodyPr>
           <a:lstStyle/>
@@ -23306,7 +23774,7 @@
           <a:noFill/>
         </p:spPr>
         <p:txBody>
-          <a:bodyPr wrap="square" anchor="ctr" lIns="0" rIns="0" tIns="0" bIns="0">
+          <a:bodyPr wrap="square" lIns="0" tIns="0" rIns="0" bIns="0" anchor="ctr">
             <a:spAutoFit/>
           </a:bodyPr>
           <a:lstStyle/>
@@ -23345,7 +23813,7 @@
           <a:noFill/>
         </p:spPr>
         <p:txBody>
-          <a:bodyPr wrap="square" anchor="ctr" lIns="0" rIns="0" tIns="0" bIns="0">
+          <a:bodyPr wrap="square" lIns="0" tIns="0" rIns="0" bIns="0" anchor="ctr">
             <a:spAutoFit/>
           </a:bodyPr>
           <a:lstStyle/>
@@ -23384,7 +23852,7 @@
           <a:noFill/>
         </p:spPr>
         <p:txBody>
-          <a:bodyPr wrap="square" anchor="t" lIns="0" rIns="0" tIns="0" bIns="0">
+          <a:bodyPr wrap="square" lIns="0" tIns="0" rIns="0" bIns="0" anchor="t">
             <a:spAutoFit/>
           </a:bodyPr>
           <a:lstStyle/>
@@ -23449,6 +23917,7 @@
           <a:lstStyle/>
           <a:p>
             <a:pPr algn="ctr"/>
+            <a:endParaRPr/>
           </a:p>
         </p:txBody>
       </p:sp>
@@ -23469,7 +23938,7 @@
           <a:noFill/>
         </p:spPr>
         <p:txBody>
-          <a:bodyPr wrap="square" anchor="ctr" lIns="0" rIns="0" tIns="0" bIns="0">
+          <a:bodyPr wrap="square" lIns="0" tIns="0" rIns="0" bIns="0" anchor="ctr">
             <a:spAutoFit/>
           </a:bodyPr>
           <a:lstStyle/>
@@ -23508,7 +23977,7 @@
           <a:noFill/>
         </p:spPr>
         <p:txBody>
-          <a:bodyPr wrap="square" anchor="ctr" lIns="0" rIns="0" tIns="0" bIns="0">
+          <a:bodyPr wrap="square" lIns="0" tIns="0" rIns="0" bIns="0" anchor="ctr">
             <a:spAutoFit/>
           </a:bodyPr>
           <a:lstStyle/>
@@ -23580,31 +24049,13 @@
           <a:lstStyle/>
           <a:p>
             <a:r>
-              <a:rPr sz="2200" spc="20" dirty="0">
+              <a:rPr lang="en-HK" sz="2200" spc="20" dirty="0">
                 <a:solidFill>
                   <a:srgbClr val="00B388"/>
                 </a:solidFill>
                 <a:latin typeface="AvenirNext LT Pro Light"/>
               </a:rPr>
-              <a:t>24 months to first GaN</a:t>
-            </a:r>
-            <a:r>
-              <a:rPr lang="en-HK" sz="2200" spc="20" dirty="0">
-                <a:solidFill>
-                  <a:srgbClr val="00B388"/>
-                </a:solidFill>
-                <a:latin typeface="AvenirNext LT Pro Light"/>
-              </a:rPr>
-              <a:t/>
-            </a:r>
-            <a:r>
-              <a:rPr sz="2200" spc="20" dirty="0">
-                <a:solidFill>
-                  <a:srgbClr val="00B388"/>
-                </a:solidFill>
-                <a:latin typeface="AvenirNext LT Pro Light"/>
-              </a:rPr>
-              <a:t/>
+              <a:t>Three risks we manage from day one</a:t>
             </a:r>
           </a:p>
         </p:txBody>
@@ -23631,7 +24082,7 @@
                 </a:solidFill>
                 <a:latin typeface="AvenirNext LT Pro Medium"/>
               </a:rPr>
-              <a:t>NITRIDE MBE PROPOSAL · ROADMAP</a:t>
+              <a:t>NITRIDE MBE PROPOSAL · RISKS</a:t>
             </a:r>
           </a:p>
         </p:txBody>
@@ -23645,11 +24096,11 @@
         <p:spPr>
           <a:xfrm>
             <a:off x="612648" y="1389888"/>
-            <a:ext cx="7918704" cy="512064"/>
+            <a:ext cx="2514600" cy="3090672"/>
           </a:xfrm>
           <a:prstGeom prst="roundRect">
             <a:avLst>
-              <a:gd name="adj" fmla="val 14000"/>
+              <a:gd name="adj" fmla="val 5500"/>
             </a:avLst>
           </a:prstGeom>
           <a:solidFill>
@@ -23679,6 +24130,7 @@
           <a:lstStyle/>
           <a:p>
             <a:pPr algn="ctr"/>
+            <a:endParaRPr/>
           </a:p>
         </p:txBody>
       </p:sp>
@@ -23690,7 +24142,7 @@
         </p:nvSpPr>
         <p:spPr>
           <a:xfrm>
-            <a:off x="740664" y="1508760"/>
+            <a:off x="740664" y="1517904"/>
             <a:ext cx="274320" cy="274320"/>
           </a:xfrm>
           <a:prstGeom prst="ellipse">
@@ -23719,18 +24171,18 @@
           </a:fontRef>
         </p:style>
         <p:txBody>
-          <a:bodyPr rtlCol="0" anchor="ctr" lIns="0" rIns="0" tIns="0" bIns="0"/>
+          <a:bodyPr lIns="0" tIns="0" rIns="0" bIns="0" rtlCol="0" anchor="ctr"/>
           <a:lstStyle/>
           <a:p>
             <a:pPr algn="ctr"/>
             <a:r>
-              <a:rPr sz="800">
+              <a:rPr sz="900">
                 <a:solidFill>
                   <a:srgbClr val="FFFFFF"/>
                 </a:solidFill>
                 <a:latin typeface="AvenirNext LT Pro Medium"/>
               </a:rPr>
-              <a:t>P0</a:t>
+              <a:t>01</a:t>
             </a:r>
           </a:p>
         </p:txBody>
@@ -23743,8 +24195,8 @@
         </p:nvSpPr>
         <p:spPr>
           <a:xfrm>
-            <a:off x="1161288" y="1389888"/>
-            <a:ext cx="1600200" cy="512064"/>
+            <a:off x="1124712" y="1554480"/>
+            <a:ext cx="1856232" cy="228600"/>
           </a:xfrm>
           <a:prstGeom prst="rect">
             <a:avLst/>
@@ -23752,7 +24204,7 @@
           <a:noFill/>
         </p:spPr>
         <p:txBody>
-          <a:bodyPr wrap="square" anchor="ctr" lIns="0" rIns="0" tIns="0" bIns="0">
+          <a:bodyPr wrap="square" lIns="0" tIns="0" rIns="0" bIns="0" anchor="t">
             <a:spAutoFit/>
           </a:bodyPr>
           <a:lstStyle/>
@@ -23763,13 +24215,13 @@
               </a:lnSpc>
             </a:pPr>
             <a:r>
-              <a:rPr sz="950">
+              <a:rPr sz="1000">
                 <a:solidFill>
                   <a:srgbClr val="191919"/>
                 </a:solidFill>
                 <a:latin typeface="AvenirNext LT Pro Medium"/>
               </a:rPr>
-              <a:t>Export licence</a:t>
+              <a:t>Export control</a:t>
             </a:r>
           </a:p>
         </p:txBody>
@@ -23782,8 +24234,8 @@
         </p:nvSpPr>
         <p:spPr>
           <a:xfrm>
-            <a:off x="2834640" y="1389888"/>
-            <a:ext cx="4480560" cy="512064"/>
+            <a:off x="740664" y="1956816"/>
+            <a:ext cx="2240280" cy="1417320"/>
           </a:xfrm>
           <a:prstGeom prst="rect">
             <a:avLst/>
@@ -23791,7 +24243,46 @@
           <a:noFill/>
         </p:spPr>
         <p:txBody>
-          <a:bodyPr wrap="square" anchor="ctr" lIns="0" rIns="0" tIns="0" bIns="0">
+          <a:bodyPr wrap="square" lIns="0" tIns="0" rIns="0" bIns="0" anchor="t">
+            <a:spAutoFit/>
+          </a:bodyPr>
+          <a:lstStyle/>
+          <a:p>
+            <a:pPr algn="l">
+              <a:lnSpc>
+                <a:spcPct val="118000"/>
+              </a:lnSpc>
+            </a:pPr>
+            <a:r>
+              <a:rPr sz="720">
+                <a:solidFill>
+                  <a:srgbClr val="191919"/>
+                </a:solidFill>
+                <a:latin typeface="Outfit"/>
+              </a:rPr>
+              <a:t>MBE growth equipment is a listed strategic commodity — a Hong Kong import licence (3B001(a)(3)) is required whatever the origin. US-origin parts additionally need a BIS licence, since the US has treated HK as mainland China since Dec 2020, and approval is not assured.</a:t>
+            </a:r>
+          </a:p>
+        </p:txBody>
+      </p:sp>
+      <p:sp>
+        <p:nvSpPr>
+          <p:cNvPr id="8" name="TextBox 7"/>
+          <p:cNvSpPr txBox="1"/>
+          <p:nvPr/>
+        </p:nvSpPr>
+        <p:spPr>
+          <a:xfrm>
+            <a:off x="740664" y="3438144"/>
+            <a:ext cx="2240280" cy="164592"/>
+          </a:xfrm>
+          <a:prstGeom prst="rect">
+            <a:avLst/>
+          </a:prstGeom>
+          <a:noFill/>
+        </p:spPr>
+        <p:txBody>
+          <a:bodyPr wrap="square" lIns="0" tIns="0" rIns="0" bIns="0" anchor="t">
             <a:spAutoFit/>
           </a:bodyPr>
           <a:lstStyle/>
@@ -23802,27 +24293,27 @@
               </a:lnSpc>
             </a:pPr>
             <a:r>
-              <a:rPr sz="730">
-                <a:solidFill>
-                  <a:srgbClr val="666666"/>
-                </a:solidFill>
-                <a:latin typeface="Outfit"/>
+              <a:rPr sz="700" spc="60">
+                <a:solidFill>
+                  <a:srgbClr val="00B388"/>
+                </a:solidFill>
+                <a:latin typeface="AvenirNext LT Pro Medium"/>
               </a:rPr>
-              <a:t>HK import licence (3B001) + ECCN checks — go / no-go on US-origin parts</a:t>
-            </a:r>
-          </a:p>
-        </p:txBody>
-      </p:sp>
-      <p:sp>
-        <p:nvSpPr>
-          <p:cNvPr id="8" name="TextBox 7"/>
+              <a:t>MITIGATION</a:t>
+            </a:r>
+          </a:p>
+        </p:txBody>
+      </p:sp>
+      <p:sp>
+        <p:nvSpPr>
+          <p:cNvPr id="9" name="TextBox 8"/>
           <p:cNvSpPr txBox="1"/>
           <p:nvPr/>
         </p:nvSpPr>
         <p:spPr>
           <a:xfrm>
-            <a:off x="7543800" y="1389888"/>
-            <a:ext cx="859536" cy="512064"/>
+            <a:off x="740664" y="3639312"/>
+            <a:ext cx="2240280" cy="777240"/>
           </a:xfrm>
           <a:prstGeom prst="rect">
             <a:avLst/>
@@ -23830,46 +24321,46 @@
           <a:noFill/>
         </p:spPr>
         <p:txBody>
-          <a:bodyPr wrap="square" anchor="ctr" lIns="0" rIns="0" tIns="0" bIns="0">
+          <a:bodyPr wrap="square" lIns="0" tIns="0" rIns="0" bIns="0" anchor="t">
             <a:spAutoFit/>
           </a:bodyPr>
           <a:lstStyle/>
           <a:p>
-            <a:pPr algn="r">
+            <a:pPr algn="l">
               <a:lnSpc>
-                <a:spcPct val="120000"/>
+                <a:spcPct val="118000"/>
               </a:lnSpc>
             </a:pPr>
             <a:r>
-              <a:rPr sz="800" spc="40">
-                <a:solidFill>
-                  <a:srgbClr val="00B388"/>
-                </a:solidFill>
-                <a:latin typeface="AvenirNext LT Pro Medium"/>
+              <a:rPr sz="700">
+                <a:solidFill>
+                  <a:srgbClr val="666666"/>
+                </a:solidFill>
+                <a:latin typeface="Outfit"/>
               </a:rPr>
-              <a:t>MO 0–4</a:t>
-            </a:r>
-          </a:p>
-        </p:txBody>
-      </p:sp>
-      <p:sp>
-        <p:nvSpPr>
-          <p:cNvPr id="9" name="Rounded Rectangle 8"/>
+              <a:t>classify every candidate part's ECCN before any PO; prefer EU sources (Riber, MBE-Komponenten, STAIB) or domestic builders as fallback; licence path confirmed = go / no-go gate P0</a:t>
+            </a:r>
+          </a:p>
+        </p:txBody>
+      </p:sp>
+      <p:sp>
+        <p:nvSpPr>
+          <p:cNvPr id="10" name="Rounded Rectangle 9"/>
           <p:cNvSpPr/>
           <p:nvPr/>
         </p:nvSpPr>
         <p:spPr>
           <a:xfrm>
-            <a:off x="6720840" y="1554480"/>
-            <a:ext cx="603504" cy="182880"/>
+            <a:off x="3310128" y="1389888"/>
+            <a:ext cx="2514600" cy="3090672"/>
           </a:xfrm>
           <a:prstGeom prst="roundRect">
             <a:avLst>
-              <a:gd name="adj" fmla="val 50000"/>
+              <a:gd name="adj" fmla="val 5500"/>
             </a:avLst>
           </a:prstGeom>
           <a:solidFill>
-            <a:srgbClr val="FFFFFF"/>
+            <a:srgbClr val="F5F5F5"/>
           </a:solidFill>
           <a:ln>
             <a:noFill/>
@@ -23891,40 +24382,30 @@
           </a:fontRef>
         </p:style>
         <p:txBody>
-          <a:bodyPr rtlCol="0" anchor="ctr" lIns="0" rIns="0" tIns="0" bIns="0"/>
+          <a:bodyPr rtlCol="0" anchor="ctr"/>
           <a:lstStyle/>
           <a:p>
             <a:pPr algn="ctr"/>
-            <a:r>
-              <a:rPr sz="660" spc="60">
-                <a:solidFill>
-                  <a:srgbClr val="00B388"/>
-                </a:solidFill>
-                <a:latin typeface="AvenirNext LT Pro Medium"/>
-              </a:rPr>
-              <a:t>GATING</a:t>
-            </a:r>
-          </a:p>
-        </p:txBody>
-      </p:sp>
-      <p:sp>
-        <p:nvSpPr>
-          <p:cNvPr id="10" name="Rounded Rectangle 9"/>
+            <a:endParaRPr/>
+          </a:p>
+        </p:txBody>
+      </p:sp>
+      <p:sp>
+        <p:nvSpPr>
+          <p:cNvPr id="11" name="Oval 10"/>
           <p:cNvSpPr/>
           <p:nvPr/>
         </p:nvSpPr>
         <p:spPr>
           <a:xfrm>
-            <a:off x="612648" y="1956816"/>
-            <a:ext cx="7918704" cy="512064"/>
-          </a:xfrm>
-          <a:prstGeom prst="roundRect">
-            <a:avLst>
-              <a:gd name="adj" fmla="val 14000"/>
-            </a:avLst>
+            <a:off x="3438144" y="1517904"/>
+            <a:ext cx="274320" cy="274320"/>
+          </a:xfrm>
+          <a:prstGeom prst="ellipse">
+            <a:avLst/>
           </a:prstGeom>
           <a:solidFill>
-            <a:srgbClr val="F5F5F5"/>
+            <a:srgbClr val="00B388"/>
           </a:solidFill>
           <a:ln>
             <a:noFill/>
@@ -23946,29 +24427,196 @@
           </a:fontRef>
         </p:style>
         <p:txBody>
-          <a:bodyPr rtlCol="0" anchor="ctr"/>
+          <a:bodyPr lIns="0" tIns="0" rIns="0" bIns="0" rtlCol="0" anchor="ctr"/>
           <a:lstStyle/>
           <a:p>
             <a:pPr algn="ctr"/>
-          </a:p>
-        </p:txBody>
-      </p:sp>
-      <p:sp>
-        <p:nvSpPr>
-          <p:cNvPr id="11" name="Oval 10"/>
+            <a:r>
+              <a:rPr sz="900">
+                <a:solidFill>
+                  <a:srgbClr val="FFFFFF"/>
+                </a:solidFill>
+                <a:latin typeface="AvenirNext LT Pro Medium"/>
+              </a:rPr>
+              <a:t>02</a:t>
+            </a:r>
+          </a:p>
+        </p:txBody>
+      </p:sp>
+      <p:sp>
+        <p:nvSpPr>
+          <p:cNvPr id="12" name="TextBox 11"/>
+          <p:cNvSpPr txBox="1"/>
+          <p:nvPr/>
+        </p:nvSpPr>
+        <p:spPr>
+          <a:xfrm>
+            <a:off x="3822191" y="1554480"/>
+            <a:ext cx="1856232" cy="228600"/>
+          </a:xfrm>
+          <a:prstGeom prst="rect">
+            <a:avLst/>
+          </a:prstGeom>
+          <a:noFill/>
+        </p:spPr>
+        <p:txBody>
+          <a:bodyPr wrap="square" lIns="0" tIns="0" rIns="0" bIns="0" anchor="t">
+            <a:spAutoFit/>
+          </a:bodyPr>
+          <a:lstStyle/>
+          <a:p>
+            <a:pPr algn="l">
+              <a:lnSpc>
+                <a:spcPct val="120000"/>
+              </a:lnSpc>
+            </a:pPr>
+            <a:r>
+              <a:rPr sz="1000">
+                <a:solidFill>
+                  <a:srgbClr val="191919"/>
+                </a:solidFill>
+                <a:latin typeface="AvenirNext LT Pro Medium"/>
+              </a:rPr>
+              <a:t>Temperature spec</a:t>
+            </a:r>
+          </a:p>
+        </p:txBody>
+      </p:sp>
+      <p:sp>
+        <p:nvSpPr>
+          <p:cNvPr id="13" name="TextBox 12"/>
+          <p:cNvSpPr txBox="1"/>
+          <p:nvPr/>
+        </p:nvSpPr>
+        <p:spPr>
+          <a:xfrm>
+            <a:off x="3438144" y="1956816"/>
+            <a:ext cx="2240280" cy="1417320"/>
+          </a:xfrm>
+          <a:prstGeom prst="rect">
+            <a:avLst/>
+          </a:prstGeom>
+          <a:noFill/>
+        </p:spPr>
+        <p:txBody>
+          <a:bodyPr wrap="square" lIns="0" tIns="0" rIns="0" bIns="0" anchor="t">
+            <a:spAutoFit/>
+          </a:bodyPr>
+          <a:lstStyle/>
+          <a:p>
+            <a:pPr algn="l">
+              <a:lnSpc>
+                <a:spcPct val="118000"/>
+              </a:lnSpc>
+            </a:pPr>
+            <a:r>
+              <a:rPr sz="720">
+                <a:solidFill>
+                  <a:srgbClr val="191919"/>
+                </a:solidFill>
+                <a:latin typeface="Outfit"/>
+              </a:rPr>
+              <a:t>Selective-area growth only turns on above ~930–940 °C on-wafer, and AlN wants more. Used chassis come with ~900 °C GaAs manipulators — unusable — and retrofitting later means re-opening the chamber. Heater filaments also degrade in nitrogen plasma.</a:t>
+            </a:r>
+          </a:p>
+        </p:txBody>
+      </p:sp>
+      <p:sp>
+        <p:nvSpPr>
+          <p:cNvPr id="14" name="TextBox 13"/>
+          <p:cNvSpPr txBox="1"/>
+          <p:nvPr/>
+        </p:nvSpPr>
+        <p:spPr>
+          <a:xfrm>
+            <a:off x="3438144" y="3438144"/>
+            <a:ext cx="2240280" cy="164592"/>
+          </a:xfrm>
+          <a:prstGeom prst="rect">
+            <a:avLst/>
+          </a:prstGeom>
+          <a:noFill/>
+        </p:spPr>
+        <p:txBody>
+          <a:bodyPr wrap="square" lIns="0" tIns="0" rIns="0" bIns="0" anchor="t">
+            <a:spAutoFit/>
+          </a:bodyPr>
+          <a:lstStyle/>
+          <a:p>
+            <a:pPr algn="l">
+              <a:lnSpc>
+                <a:spcPct val="120000"/>
+              </a:lnSpc>
+            </a:pPr>
+            <a:r>
+              <a:rPr sz="700" spc="60">
+                <a:solidFill>
+                  <a:srgbClr val="00B388"/>
+                </a:solidFill>
+                <a:latin typeface="AvenirNext LT Pro Medium"/>
+              </a:rPr>
+              <a:t>MITIGATION</a:t>
+            </a:r>
+          </a:p>
+        </p:txBody>
+      </p:sp>
+      <p:sp>
+        <p:nvSpPr>
+          <p:cNvPr id="15" name="TextBox 14"/>
+          <p:cNvSpPr txBox="1"/>
+          <p:nvPr/>
+        </p:nvSpPr>
+        <p:spPr>
+          <a:xfrm>
+            <a:off x="3438144" y="3639312"/>
+            <a:ext cx="2240280" cy="777240"/>
+          </a:xfrm>
+          <a:prstGeom prst="rect">
+            <a:avLst/>
+          </a:prstGeom>
+          <a:noFill/>
+        </p:spPr>
+        <p:txBody>
+          <a:bodyPr wrap="square" lIns="0" tIns="0" rIns="0" bIns="0" anchor="t">
+            <a:spAutoFit/>
+          </a:bodyPr>
+          <a:lstStyle/>
+          <a:p>
+            <a:pPr algn="l">
+              <a:lnSpc>
+                <a:spcPct val="118000"/>
+              </a:lnSpc>
+            </a:pPr>
+            <a:r>
+              <a:rPr sz="700">
+                <a:solidFill>
+                  <a:srgbClr val="666666"/>
+                </a:solidFill>
+                <a:latin typeface="Outfit"/>
+              </a:rPr>
+              <a:t>order the 1200 °C manipulator as the first long-lead item; specify a W or PBN/PG heater for the N-plasma environment; treat filaments as consumables and stock spares</a:t>
+            </a:r>
+          </a:p>
+        </p:txBody>
+      </p:sp>
+      <p:sp>
+        <p:nvSpPr>
+          <p:cNvPr id="16" name="Rounded Rectangle 15"/>
           <p:cNvSpPr/>
           <p:nvPr/>
         </p:nvSpPr>
         <p:spPr>
           <a:xfrm>
-            <a:off x="740664" y="2075688"/>
-            <a:ext cx="274320" cy="274320"/>
-          </a:xfrm>
-          <a:prstGeom prst="ellipse">
-            <a:avLst/>
+            <a:off x="6007608" y="1389888"/>
+            <a:ext cx="2514600" cy="3090672"/>
+          </a:xfrm>
+          <a:prstGeom prst="roundRect">
+            <a:avLst>
+              <a:gd name="adj" fmla="val 5500"/>
+            </a:avLst>
           </a:prstGeom>
           <a:solidFill>
-            <a:srgbClr val="00B388"/>
+            <a:srgbClr val="F5F5F5"/>
           </a:solidFill>
           <a:ln>
             <a:noFill/>
@@ -23990,157 +24638,30 @@
           </a:fontRef>
         </p:style>
         <p:txBody>
-          <a:bodyPr rtlCol="0" anchor="ctr" lIns="0" rIns="0" tIns="0" bIns="0"/>
+          <a:bodyPr rtlCol="0" anchor="ctr"/>
           <a:lstStyle/>
           <a:p>
             <a:pPr algn="ctr"/>
-            <a:r>
-              <a:rPr sz="800">
-                <a:solidFill>
-                  <a:srgbClr val="FFFFFF"/>
-                </a:solidFill>
-                <a:latin typeface="AvenirNext LT Pro Medium"/>
-              </a:rPr>
-              <a:t>P1</a:t>
-            </a:r>
-          </a:p>
-        </p:txBody>
-      </p:sp>
-      <p:sp>
-        <p:nvSpPr>
-          <p:cNvPr id="12" name="TextBox 11"/>
-          <p:cNvSpPr txBox="1"/>
-          <p:nvPr/>
-        </p:nvSpPr>
-        <p:spPr>
-          <a:xfrm>
-            <a:off x="1161288" y="1956816"/>
-            <a:ext cx="1600200" cy="512064"/>
-          </a:xfrm>
-          <a:prstGeom prst="rect">
-            <a:avLst/>
-          </a:prstGeom>
-          <a:noFill/>
-        </p:spPr>
-        <p:txBody>
-          <a:bodyPr wrap="square" anchor="ctr" lIns="0" rIns="0" tIns="0" bIns="0">
-            <a:spAutoFit/>
-          </a:bodyPr>
-          <a:lstStyle/>
-          <a:p>
-            <a:pPr algn="l">
-              <a:lnSpc>
-                <a:spcPct val="120000"/>
-              </a:lnSpc>
-            </a:pPr>
-            <a:r>
-              <a:rPr sz="950">
-                <a:solidFill>
-                  <a:srgbClr val="191919"/>
-                </a:solidFill>
-                <a:latin typeface="AvenirNext LT Pro Medium"/>
-              </a:rPr>
-              <a:t>Procurement</a:t>
-            </a:r>
-          </a:p>
-        </p:txBody>
-      </p:sp>
-      <p:sp>
-        <p:nvSpPr>
-          <p:cNvPr id="13" name="TextBox 12"/>
-          <p:cNvSpPr txBox="1"/>
-          <p:nvPr/>
-        </p:nvSpPr>
-        <p:spPr>
-          <a:xfrm>
-            <a:off x="2834640" y="1956816"/>
-            <a:ext cx="4480560" cy="512064"/>
-          </a:xfrm>
-          <a:prstGeom prst="rect">
-            <a:avLst/>
-          </a:prstGeom>
-          <a:noFill/>
-        </p:spPr>
-        <p:txBody>
-          <a:bodyPr wrap="square" anchor="ctr" lIns="0" rIns="0" tIns="0" bIns="0">
-            <a:spAutoFit/>
-          </a:bodyPr>
-          <a:lstStyle/>
-          <a:p>
-            <a:pPr algn="l">
-              <a:lnSpc>
-                <a:spcPct val="120000"/>
-              </a:lnSpc>
-            </a:pPr>
-            <a:r>
-              <a:rPr sz="730">
-                <a:solidFill>
-                  <a:srgbClr val="666666"/>
-                </a:solidFill>
-                <a:latin typeface="Outfit"/>
-              </a:rPr>
-              <a:t>chassis + long-lead trio: plasma source · manipulator · turbo — in parallel with P0</a:t>
-            </a:r>
-          </a:p>
-        </p:txBody>
-      </p:sp>
-      <p:sp>
-        <p:nvSpPr>
-          <p:cNvPr id="14" name="TextBox 13"/>
-          <p:cNvSpPr txBox="1"/>
-          <p:nvPr/>
-        </p:nvSpPr>
-        <p:spPr>
-          <a:xfrm>
-            <a:off x="7543800" y="1956816"/>
-            <a:ext cx="859536" cy="512064"/>
-          </a:xfrm>
-          <a:prstGeom prst="rect">
-            <a:avLst/>
-          </a:prstGeom>
-          <a:noFill/>
-        </p:spPr>
-        <p:txBody>
-          <a:bodyPr wrap="square" anchor="ctr" lIns="0" rIns="0" tIns="0" bIns="0">
-            <a:spAutoFit/>
-          </a:bodyPr>
-          <a:lstStyle/>
-          <a:p>
-            <a:pPr algn="r">
-              <a:lnSpc>
-                <a:spcPct val="120000"/>
-              </a:lnSpc>
-            </a:pPr>
-            <a:r>
-              <a:rPr sz="800" spc="40">
-                <a:solidFill>
-                  <a:srgbClr val="00B388"/>
-                </a:solidFill>
-                <a:latin typeface="AvenirNext LT Pro Medium"/>
-              </a:rPr>
-              <a:t>MO 2–8</a:t>
-            </a:r>
-          </a:p>
-        </p:txBody>
-      </p:sp>
-      <p:sp>
-        <p:nvSpPr>
-          <p:cNvPr id="15" name="Rounded Rectangle 14"/>
+            <a:endParaRPr/>
+          </a:p>
+        </p:txBody>
+      </p:sp>
+      <p:sp>
+        <p:nvSpPr>
+          <p:cNvPr id="17" name="Oval 16"/>
           <p:cNvSpPr/>
           <p:nvPr/>
         </p:nvSpPr>
         <p:spPr>
           <a:xfrm>
-            <a:off x="612648" y="2523744"/>
-            <a:ext cx="7918704" cy="512064"/>
-          </a:xfrm>
-          <a:prstGeom prst="roundRect">
-            <a:avLst>
-              <a:gd name="adj" fmla="val 14000"/>
-            </a:avLst>
+            <a:off x="6135624" y="1517904"/>
+            <a:ext cx="274320" cy="274320"/>
+          </a:xfrm>
+          <a:prstGeom prst="ellipse">
+            <a:avLst/>
           </a:prstGeom>
           <a:solidFill>
-            <a:srgbClr val="F5F5F5"/>
+            <a:srgbClr val="00B388"/>
           </a:solidFill>
           <a:ln>
             <a:noFill/>
@@ -24162,76 +24683,32 @@
           </a:fontRef>
         </p:style>
         <p:txBody>
-          <a:bodyPr rtlCol="0" anchor="ctr"/>
+          <a:bodyPr lIns="0" tIns="0" rIns="0" bIns="0" rtlCol="0" anchor="ctr"/>
           <a:lstStyle/>
           <a:p>
             <a:pPr algn="ctr"/>
-          </a:p>
-        </p:txBody>
-      </p:sp>
-      <p:sp>
-        <p:nvSpPr>
-          <p:cNvPr id="16" name="Oval 15"/>
-          <p:cNvSpPr/>
-          <p:nvPr/>
-        </p:nvSpPr>
-        <p:spPr>
-          <a:xfrm>
-            <a:off x="740664" y="2642616"/>
-            <a:ext cx="274320" cy="274320"/>
-          </a:xfrm>
-          <a:prstGeom prst="ellipse">
-            <a:avLst/>
-          </a:prstGeom>
-          <a:solidFill>
-            <a:srgbClr val="00B388"/>
-          </a:solidFill>
-          <a:ln>
-            <a:noFill/>
-          </a:ln>
-          <a:effectLst/>
-        </p:spPr>
-        <p:style>
-          <a:lnRef idx="1">
-            <a:schemeClr val="accent1"/>
-          </a:lnRef>
-          <a:fillRef idx="3">
-            <a:schemeClr val="accent1"/>
-          </a:fillRef>
-          <a:effectRef idx="2">
-            <a:schemeClr val="accent1"/>
-          </a:effectRef>
-          <a:fontRef idx="minor">
-            <a:schemeClr val="lt1"/>
-          </a:fontRef>
-        </p:style>
-        <p:txBody>
-          <a:bodyPr rtlCol="0" anchor="ctr" lIns="0" rIns="0" tIns="0" bIns="0"/>
-          <a:lstStyle/>
-          <a:p>
-            <a:pPr algn="ctr"/>
-            <a:r>
-              <a:rPr sz="800">
+            <a:r>
+              <a:rPr sz="900">
                 <a:solidFill>
                   <a:srgbClr val="FFFFFF"/>
                 </a:solidFill>
                 <a:latin typeface="AvenirNext LT Pro Medium"/>
               </a:rPr>
-              <a:t>P2</a:t>
-            </a:r>
-          </a:p>
-        </p:txBody>
-      </p:sp>
-      <p:sp>
-        <p:nvSpPr>
-          <p:cNvPr id="17" name="TextBox 16"/>
+              <a:t>03</a:t>
+            </a:r>
+          </a:p>
+        </p:txBody>
+      </p:sp>
+      <p:sp>
+        <p:nvSpPr>
+          <p:cNvPr id="18" name="TextBox 17"/>
           <p:cNvSpPr txBox="1"/>
           <p:nvPr/>
         </p:nvSpPr>
         <p:spPr>
           <a:xfrm>
-            <a:off x="1161288" y="2523744"/>
-            <a:ext cx="1600200" cy="512064"/>
+            <a:off x="6519672" y="1554480"/>
+            <a:ext cx="1856232" cy="228600"/>
           </a:xfrm>
           <a:prstGeom prst="rect">
             <a:avLst/>
@@ -24239,7 +24716,7 @@
           <a:noFill/>
         </p:spPr>
         <p:txBody>
-          <a:bodyPr wrap="square" anchor="ctr" lIns="0" rIns="0" tIns="0" bIns="0">
+          <a:bodyPr wrap="square" lIns="0" tIns="0" rIns="0" bIns="0" anchor="t">
             <a:spAutoFit/>
           </a:bodyPr>
           <a:lstStyle/>
@@ -24250,27 +24727,27 @@
               </a:lnSpc>
             </a:pPr>
             <a:r>
-              <a:rPr sz="950">
+              <a:rPr sz="1000">
                 <a:solidFill>
                   <a:srgbClr val="191919"/>
                 </a:solidFill>
                 <a:latin typeface="AvenirNext LT Pro Medium"/>
               </a:rPr>
-              <a:t>Rebuild</a:t>
-            </a:r>
-          </a:p>
-        </p:txBody>
-      </p:sp>
-      <p:sp>
-        <p:nvSpPr>
-          <p:cNvPr id="18" name="TextBox 17"/>
+              <a:t>N₂ gas load</a:t>
+            </a:r>
+          </a:p>
+        </p:txBody>
+      </p:sp>
+      <p:sp>
+        <p:nvSpPr>
+          <p:cNvPr id="19" name="TextBox 18"/>
           <p:cNvSpPr txBox="1"/>
           <p:nvPr/>
         </p:nvSpPr>
         <p:spPr>
           <a:xfrm>
-            <a:off x="2834640" y="2523744"/>
-            <a:ext cx="4480560" cy="512064"/>
+            <a:off x="6135624" y="1956816"/>
+            <a:ext cx="2240280" cy="1417320"/>
           </a:xfrm>
           <a:prstGeom prst="rect">
             <a:avLst/>
@@ -24278,7 +24755,46 @@
           <a:noFill/>
         </p:spPr>
         <p:txBody>
-          <a:bodyPr wrap="square" anchor="ctr" lIns="0" rIns="0" tIns="0" bIns="0">
+          <a:bodyPr wrap="square" lIns="0" tIns="0" rIns="0" bIns="0" anchor="t">
+            <a:spAutoFit/>
+          </a:bodyPr>
+          <a:lstStyle/>
+          <a:p>
+            <a:pPr algn="l">
+              <a:lnSpc>
+                <a:spcPct val="118000"/>
+              </a:lnSpc>
+            </a:pPr>
+            <a:r>
+              <a:rPr sz="720">
+                <a:solidFill>
+                  <a:srgbClr val="191919"/>
+                </a:solidFill>
+                <a:latin typeface="Outfit"/>
+              </a:rPr>
+              <a:t>Nitride growth runs at ~10⁻⁵ Torr of continuous N₂. Ion pumps saturate and cryopumps need constant regeneration at this load — a mis-sized vacuum stack is usually discovered only at first plasma, after the rebuild is finished.</a:t>
+            </a:r>
+          </a:p>
+        </p:txBody>
+      </p:sp>
+      <p:sp>
+        <p:nvSpPr>
+          <p:cNvPr id="20" name="TextBox 19"/>
+          <p:cNvSpPr txBox="1"/>
+          <p:nvPr/>
+        </p:nvSpPr>
+        <p:spPr>
+          <a:xfrm>
+            <a:off x="6135624" y="3438144"/>
+            <a:ext cx="2240280" cy="164592"/>
+          </a:xfrm>
+          <a:prstGeom prst="rect">
+            <a:avLst/>
+          </a:prstGeom>
+          <a:noFill/>
+        </p:spPr>
+        <p:txBody>
+          <a:bodyPr wrap="square" lIns="0" tIns="0" rIns="0" bIns="0" anchor="t">
             <a:spAutoFit/>
           </a:bodyPr>
           <a:lstStyle/>
@@ -24289,820 +24805,6 @@
               </a:lnSpc>
             </a:pPr>
             <a:r>
-              <a:rPr sz="730">
-                <a:solidFill>
-                  <a:srgbClr val="666666"/>
-                </a:solidFill>
-                <a:latin typeface="Outfit"/>
-              </a:rPr>
-              <a:t>fit nitride core · build control + DAQ layer</a:t>
-            </a:r>
-          </a:p>
-        </p:txBody>
-      </p:sp>
-      <p:sp>
-        <p:nvSpPr>
-          <p:cNvPr id="19" name="TextBox 18"/>
-          <p:cNvSpPr txBox="1"/>
-          <p:nvPr/>
-        </p:nvSpPr>
-        <p:spPr>
-          <a:xfrm>
-            <a:off x="7543800" y="2523744"/>
-            <a:ext cx="859536" cy="512064"/>
-          </a:xfrm>
-          <a:prstGeom prst="rect">
-            <a:avLst/>
-          </a:prstGeom>
-          <a:noFill/>
-        </p:spPr>
-        <p:txBody>
-          <a:bodyPr wrap="square" anchor="ctr" lIns="0" rIns="0" tIns="0" bIns="0">
-            <a:spAutoFit/>
-          </a:bodyPr>
-          <a:lstStyle/>
-          <a:p>
-            <a:pPr algn="r">
-              <a:lnSpc>
-                <a:spcPct val="120000"/>
-              </a:lnSpc>
-            </a:pPr>
-            <a:r>
-              <a:rPr sz="800" spc="40">
-                <a:solidFill>
-                  <a:srgbClr val="00B388"/>
-                </a:solidFill>
-                <a:latin typeface="AvenirNext LT Pro Medium"/>
-              </a:rPr>
-              <a:t>MO 8–15</a:t>
-            </a:r>
-          </a:p>
-        </p:txBody>
-      </p:sp>
-      <p:sp>
-        <p:nvSpPr>
-          <p:cNvPr id="20" name="Rounded Rectangle 19"/>
-          <p:cNvSpPr/>
-          <p:nvPr/>
-        </p:nvSpPr>
-        <p:spPr>
-          <a:xfrm>
-            <a:off x="612648" y="3090672"/>
-            <a:ext cx="7918704" cy="512064"/>
-          </a:xfrm>
-          <a:prstGeom prst="roundRect">
-            <a:avLst>
-              <a:gd name="adj" fmla="val 14000"/>
-            </a:avLst>
-          </a:prstGeom>
-          <a:solidFill>
-            <a:srgbClr val="F5F5F5"/>
-          </a:solidFill>
-          <a:ln>
-            <a:noFill/>
-          </a:ln>
-          <a:effectLst/>
-        </p:spPr>
-        <p:style>
-          <a:lnRef idx="1">
-            <a:schemeClr val="accent1"/>
-          </a:lnRef>
-          <a:fillRef idx="3">
-            <a:schemeClr val="accent1"/>
-          </a:fillRef>
-          <a:effectRef idx="2">
-            <a:schemeClr val="accent1"/>
-          </a:effectRef>
-          <a:fontRef idx="minor">
-            <a:schemeClr val="lt1"/>
-          </a:fontRef>
-        </p:style>
-        <p:txBody>
-          <a:bodyPr rtlCol="0" anchor="ctr"/>
-          <a:lstStyle/>
-          <a:p>
-            <a:pPr algn="ctr"/>
-          </a:p>
-        </p:txBody>
-      </p:sp>
-      <p:sp>
-        <p:nvSpPr>
-          <p:cNvPr id="21" name="Oval 20"/>
-          <p:cNvSpPr/>
-          <p:nvPr/>
-        </p:nvSpPr>
-        <p:spPr>
-          <a:xfrm>
-            <a:off x="740664" y="3209544"/>
-            <a:ext cx="274320" cy="274320"/>
-          </a:xfrm>
-          <a:prstGeom prst="ellipse">
-            <a:avLst/>
-          </a:prstGeom>
-          <a:solidFill>
-            <a:srgbClr val="00B388"/>
-          </a:solidFill>
-          <a:ln>
-            <a:noFill/>
-          </a:ln>
-          <a:effectLst/>
-        </p:spPr>
-        <p:style>
-          <a:lnRef idx="1">
-            <a:schemeClr val="accent1"/>
-          </a:lnRef>
-          <a:fillRef idx="3">
-            <a:schemeClr val="accent1"/>
-          </a:fillRef>
-          <a:effectRef idx="2">
-            <a:schemeClr val="accent1"/>
-          </a:effectRef>
-          <a:fontRef idx="minor">
-            <a:schemeClr val="lt1"/>
-          </a:fontRef>
-        </p:style>
-        <p:txBody>
-          <a:bodyPr rtlCol="0" anchor="ctr" lIns="0" rIns="0" tIns="0" bIns="0"/>
-          <a:lstStyle/>
-          <a:p>
-            <a:pPr algn="ctr"/>
-            <a:r>
-              <a:rPr sz="800">
-                <a:solidFill>
-                  <a:srgbClr val="FFFFFF"/>
-                </a:solidFill>
-                <a:latin typeface="AvenirNext LT Pro Medium"/>
-              </a:rPr>
-              <a:t>P3</a:t>
-            </a:r>
-          </a:p>
-        </p:txBody>
-      </p:sp>
-      <p:sp>
-        <p:nvSpPr>
-          <p:cNvPr id="22" name="TextBox 21"/>
-          <p:cNvSpPr txBox="1"/>
-          <p:nvPr/>
-        </p:nvSpPr>
-        <p:spPr>
-          <a:xfrm>
-            <a:off x="1161288" y="3090672"/>
-            <a:ext cx="1600200" cy="512064"/>
-          </a:xfrm>
-          <a:prstGeom prst="rect">
-            <a:avLst/>
-          </a:prstGeom>
-          <a:noFill/>
-        </p:spPr>
-        <p:txBody>
-          <a:bodyPr wrap="square" anchor="ctr" lIns="0" rIns="0" tIns="0" bIns="0">
-            <a:spAutoFit/>
-          </a:bodyPr>
-          <a:lstStyle/>
-          <a:p>
-            <a:pPr algn="l">
-              <a:lnSpc>
-                <a:spcPct val="120000"/>
-              </a:lnSpc>
-            </a:pPr>
-            <a:r>
-              <a:rPr sz="950">
-                <a:solidFill>
-                  <a:srgbClr val="191919"/>
-                </a:solidFill>
-                <a:latin typeface="AvenirNext LT Pro Medium"/>
-              </a:rPr>
-              <a:t>Commissioning</a:t>
-            </a:r>
-          </a:p>
-        </p:txBody>
-      </p:sp>
-      <p:sp>
-        <p:nvSpPr>
-          <p:cNvPr id="23" name="TextBox 22"/>
-          <p:cNvSpPr txBox="1"/>
-          <p:nvPr/>
-        </p:nvSpPr>
-        <p:spPr>
-          <a:xfrm>
-            <a:off x="2834640" y="3090672"/>
-            <a:ext cx="4480560" cy="512064"/>
-          </a:xfrm>
-          <a:prstGeom prst="rect">
-            <a:avLst/>
-          </a:prstGeom>
-          <a:noFill/>
-        </p:spPr>
-        <p:txBody>
-          <a:bodyPr wrap="square" anchor="ctr" lIns="0" rIns="0" tIns="0" bIns="0">
-            <a:spAutoFit/>
-          </a:bodyPr>
-          <a:lstStyle/>
-          <a:p>
-            <a:pPr algn="l">
-              <a:lnSpc>
-                <a:spcPct val="120000"/>
-              </a:lnSpc>
-            </a:pPr>
-            <a:r>
-              <a:rPr sz="730">
-                <a:solidFill>
-                  <a:srgbClr val="666666"/>
-                </a:solidFill>
-                <a:latin typeface="Outfit"/>
-              </a:rPr>
-              <a:t>bake-out · leak-chase · plasma + flux calibration</a:t>
-            </a:r>
-          </a:p>
-        </p:txBody>
-      </p:sp>
-      <p:sp>
-        <p:nvSpPr>
-          <p:cNvPr id="24" name="TextBox 23"/>
-          <p:cNvSpPr txBox="1"/>
-          <p:nvPr/>
-        </p:nvSpPr>
-        <p:spPr>
-          <a:xfrm>
-            <a:off x="7543800" y="3090672"/>
-            <a:ext cx="859536" cy="512064"/>
-          </a:xfrm>
-          <a:prstGeom prst="rect">
-            <a:avLst/>
-          </a:prstGeom>
-          <a:noFill/>
-        </p:spPr>
-        <p:txBody>
-          <a:bodyPr wrap="square" anchor="ctr" lIns="0" rIns="0" tIns="0" bIns="0">
-            <a:spAutoFit/>
-          </a:bodyPr>
-          <a:lstStyle/>
-          <a:p>
-            <a:pPr algn="r">
-              <a:lnSpc>
-                <a:spcPct val="120000"/>
-              </a:lnSpc>
-            </a:pPr>
-            <a:r>
-              <a:rPr sz="800" spc="40">
-                <a:solidFill>
-                  <a:srgbClr val="00B388"/>
-                </a:solidFill>
-                <a:latin typeface="AvenirNext LT Pro Medium"/>
-              </a:rPr>
-              <a:t>MO 15–20</a:t>
-            </a:r>
-          </a:p>
-        </p:txBody>
-      </p:sp>
-      <p:sp>
-        <p:nvSpPr>
-          <p:cNvPr id="25" name="Rounded Rectangle 24"/>
-          <p:cNvSpPr/>
-          <p:nvPr/>
-        </p:nvSpPr>
-        <p:spPr>
-          <a:xfrm>
-            <a:off x="612648" y="3657600"/>
-            <a:ext cx="7918704" cy="512064"/>
-          </a:xfrm>
-          <a:prstGeom prst="roundRect">
-            <a:avLst>
-              <a:gd name="adj" fmla="val 14000"/>
-            </a:avLst>
-          </a:prstGeom>
-          <a:solidFill>
-            <a:srgbClr val="F5F5F5"/>
-          </a:solidFill>
-          <a:ln>
-            <a:noFill/>
-          </a:ln>
-          <a:effectLst/>
-        </p:spPr>
-        <p:style>
-          <a:lnRef idx="1">
-            <a:schemeClr val="accent1"/>
-          </a:lnRef>
-          <a:fillRef idx="3">
-            <a:schemeClr val="accent1"/>
-          </a:fillRef>
-          <a:effectRef idx="2">
-            <a:schemeClr val="accent1"/>
-          </a:effectRef>
-          <a:fontRef idx="minor">
-            <a:schemeClr val="lt1"/>
-          </a:fontRef>
-        </p:style>
-        <p:txBody>
-          <a:bodyPr rtlCol="0" anchor="ctr"/>
-          <a:lstStyle/>
-          <a:p>
-            <a:pPr algn="ctr"/>
-          </a:p>
-        </p:txBody>
-      </p:sp>
-      <p:sp>
-        <p:nvSpPr>
-          <p:cNvPr id="26" name="Oval 25"/>
-          <p:cNvSpPr/>
-          <p:nvPr/>
-        </p:nvSpPr>
-        <p:spPr>
-          <a:xfrm>
-            <a:off x="740664" y="3776472"/>
-            <a:ext cx="274320" cy="274320"/>
-          </a:xfrm>
-          <a:prstGeom prst="ellipse">
-            <a:avLst/>
-          </a:prstGeom>
-          <a:solidFill>
-            <a:srgbClr val="00B388"/>
-          </a:solidFill>
-          <a:ln>
-            <a:noFill/>
-          </a:ln>
-          <a:effectLst/>
-        </p:spPr>
-        <p:style>
-          <a:lnRef idx="1">
-            <a:schemeClr val="accent1"/>
-          </a:lnRef>
-          <a:fillRef idx="3">
-            <a:schemeClr val="accent1"/>
-          </a:fillRef>
-          <a:effectRef idx="2">
-            <a:schemeClr val="accent1"/>
-          </a:effectRef>
-          <a:fontRef idx="minor">
-            <a:schemeClr val="lt1"/>
-          </a:fontRef>
-        </p:style>
-        <p:txBody>
-          <a:bodyPr rtlCol="0" anchor="ctr" lIns="0" rIns="0" tIns="0" bIns="0"/>
-          <a:lstStyle/>
-          <a:p>
-            <a:pPr algn="ctr"/>
-            <a:r>
-              <a:rPr sz="800">
-                <a:solidFill>
-                  <a:srgbClr val="FFFFFF"/>
-                </a:solidFill>
-                <a:latin typeface="AvenirNext LT Pro Medium"/>
-              </a:rPr>
-              <a:t>P4</a:t>
-            </a:r>
-          </a:p>
-        </p:txBody>
-      </p:sp>
-      <p:sp>
-        <p:nvSpPr>
-          <p:cNvPr id="27" name="TextBox 26"/>
-          <p:cNvSpPr txBox="1"/>
-          <p:nvPr/>
-        </p:nvSpPr>
-        <p:spPr>
-          <a:xfrm>
-            <a:off x="1161288" y="3657600"/>
-            <a:ext cx="1600200" cy="512064"/>
-          </a:xfrm>
-          <a:prstGeom prst="rect">
-            <a:avLst/>
-          </a:prstGeom>
-          <a:noFill/>
-        </p:spPr>
-        <p:txBody>
-          <a:bodyPr wrap="square" anchor="ctr" lIns="0" rIns="0" tIns="0" bIns="0">
-            <a:spAutoFit/>
-          </a:bodyPr>
-          <a:lstStyle/>
-          <a:p>
-            <a:pPr algn="l">
-              <a:lnSpc>
-                <a:spcPct val="120000"/>
-              </a:lnSpc>
-            </a:pPr>
-            <a:r>
-              <a:rPr sz="950">
-                <a:solidFill>
-                  <a:srgbClr val="191919"/>
-                </a:solidFill>
-                <a:latin typeface="AvenirNext LT Pro Medium"/>
-              </a:rPr>
-              <a:t>First growth</a:t>
-            </a:r>
-          </a:p>
-        </p:txBody>
-      </p:sp>
-      <p:sp>
-        <p:nvSpPr>
-          <p:cNvPr id="28" name="TextBox 27"/>
-          <p:cNvSpPr txBox="1"/>
-          <p:nvPr/>
-        </p:nvSpPr>
-        <p:spPr>
-          <a:xfrm>
-            <a:off x="2834640" y="3657600"/>
-            <a:ext cx="4480560" cy="512064"/>
-          </a:xfrm>
-          <a:prstGeom prst="rect">
-            <a:avLst/>
-          </a:prstGeom>
-          <a:noFill/>
-        </p:spPr>
-        <p:txBody>
-          <a:bodyPr wrap="square" anchor="ctr" lIns="0" rIns="0" tIns="0" bIns="0">
-            <a:spAutoFit/>
-          </a:bodyPr>
-          <a:lstStyle/>
-          <a:p>
-            <a:pPr algn="l">
-              <a:lnSpc>
-                <a:spcPct val="120000"/>
-              </a:lnSpc>
-            </a:pPr>
-            <a:r>
-              <a:rPr sz="730">
-                <a:solidFill>
-                  <a:srgbClr val="666666"/>
-                </a:solidFill>
-                <a:latin typeface="Outfit"/>
-              </a:rPr>
-              <a:t>GaN-on-Si baseline, then selective-area growth</a:t>
-            </a:r>
-          </a:p>
-        </p:txBody>
-      </p:sp>
-      <p:sp>
-        <p:nvSpPr>
-          <p:cNvPr id="29" name="TextBox 28"/>
-          <p:cNvSpPr txBox="1"/>
-          <p:nvPr/>
-        </p:nvSpPr>
-        <p:spPr>
-          <a:xfrm>
-            <a:off x="7543800" y="3657600"/>
-            <a:ext cx="859536" cy="512064"/>
-          </a:xfrm>
-          <a:prstGeom prst="rect">
-            <a:avLst/>
-          </a:prstGeom>
-          <a:noFill/>
-        </p:spPr>
-        <p:txBody>
-          <a:bodyPr wrap="square" anchor="ctr" lIns="0" rIns="0" tIns="0" bIns="0">
-            <a:spAutoFit/>
-          </a:bodyPr>
-          <a:lstStyle/>
-          <a:p>
-            <a:pPr algn="r">
-              <a:lnSpc>
-                <a:spcPct val="120000"/>
-              </a:lnSpc>
-            </a:pPr>
-            <a:r>
-              <a:rPr sz="800" spc="40">
-                <a:solidFill>
-                  <a:srgbClr val="00B388"/>
-                </a:solidFill>
-                <a:latin typeface="AvenirNext LT Pro Medium"/>
-              </a:rPr>
-              <a:t>MO 20–24</a:t>
-            </a:r>
-          </a:p>
-        </p:txBody>
-      </p:sp>
-      <p:sp>
-        <p:nvSpPr>
-          <p:cNvPr id="30" name="TextBox 29"/>
-          <p:cNvSpPr txBox="1"/>
-          <p:nvPr/>
-        </p:nvSpPr>
-        <p:spPr>
-          <a:xfrm>
-            <a:off x="612648" y="4261104"/>
-            <a:ext cx="7918704" cy="228600"/>
-          </a:xfrm>
-          <a:prstGeom prst="rect">
-            <a:avLst/>
-          </a:prstGeom>
-          <a:noFill/>
-        </p:spPr>
-        <p:txBody>
-          <a:bodyPr wrap="square" anchor="t" lIns="0" rIns="0" tIns="0" bIns="0">
-            <a:spAutoFit/>
-          </a:bodyPr>
-          <a:lstStyle/>
-          <a:p>
-            <a:pPr algn="l">
-              <a:lnSpc>
-                <a:spcPct val="120000"/>
-              </a:lnSpc>
-            </a:pPr>
-            <a:r>
-              <a:rPr sz="680">
-                <a:solidFill>
-                  <a:srgbClr val="666666"/>
-                </a:solidFill>
-                <a:latin typeface="Outfit"/>
-              </a:rPr>
-              <a:t>P0 gates everything: since Dec 2020 the US treats Hong Kong as mainland China for export controls — no PO before the licence path is confirmed.</a:t>
-            </a:r>
-          </a:p>
-        </p:txBody>
-      </p:sp>
-    </p:spTree>
-  </p:cSld>
-  <p:clrMapOvr>
-    <a:masterClrMapping/>
-  </p:clrMapOvr>
-</p:sld>
-</file>
-
-<file path=ppt/slides/slide6.xml><?xml version="1.0" encoding="utf-8"?>
-<p:sld xmlns:a="http://schemas.openxmlformats.org/drawingml/2006/main" xmlns:r="http://schemas.openxmlformats.org/officeDocument/2006/relationships" xmlns:p="http://schemas.openxmlformats.org/presentationml/2006/main">
-  <p:cSld>
-    <p:spTree>
-      <p:nvGrpSpPr>
-        <p:cNvPr id="1" name=""/>
-        <p:cNvGrpSpPr/>
-        <p:nvPr/>
-      </p:nvGrpSpPr>
-      <p:grpSpPr>
-        <a:xfrm>
-          <a:off x="0" y="0"/>
-          <a:ext cx="0" cy="0"/>
-          <a:chOff x="0" y="0"/>
-          <a:chExt cx="0" cy="0"/>
-        </a:xfrm>
-      </p:grpSpPr>
-      <p:sp>
-        <p:nvSpPr>
-          <p:cNvPr id="2" name="Text Placeholder 1"/>
-          <p:cNvSpPr>
-            <a:spLocks noGrp="1"/>
-          </p:cNvSpPr>
-          <p:nvPr>
-            <p:ph type="body" idx="1"/>
-          </p:nvPr>
-        </p:nvSpPr>
-        <p:spPr/>
-        <p:txBody>
-          <a:bodyPr/>
-          <a:lstStyle/>
-          <a:p>
-            <a:r>
-              <a:rPr lang="en-HK" sz="2200" spc="20" dirty="0">
-                <a:solidFill>
-                  <a:srgbClr val="00B388"/>
-                </a:solidFill>
-                <a:latin typeface="AvenirNext LT Pro Light"/>
-              </a:rPr>
-              <a:t>Three risks we manage from day one</a:t>
-            </a:r>
-            <a:r>
-              <a:rPr sz="2200" spc="20" dirty="0">
-                <a:solidFill>
-                  <a:srgbClr val="00B388"/>
-                </a:solidFill>
-                <a:latin typeface="AvenirNext LT Pro Light"/>
-              </a:rPr>
-              <a:t/>
-            </a:r>
-          </a:p>
-        </p:txBody>
-      </p:sp>
-      <p:sp>
-        <p:nvSpPr>
-          <p:cNvPr id="3" name="Content Placeholder 2"/>
-          <p:cNvSpPr>
-            <a:spLocks noGrp="1"/>
-          </p:cNvSpPr>
-          <p:nvPr>
-            <p:ph sz="quarter" idx="14"/>
-          </p:nvPr>
-        </p:nvSpPr>
-        <p:spPr/>
-        <p:txBody>
-          <a:bodyPr/>
-          <a:lstStyle/>
-          <a:p>
-            <a:r>
-              <a:rPr sz="800" spc="80">
-                <a:solidFill>
-                  <a:srgbClr val="191919"/>
-                </a:solidFill>
-                <a:latin typeface="AvenirNext LT Pro Medium"/>
-              </a:rPr>
-              <a:t>NITRIDE MBE PROPOSAL · RISKS</a:t>
-            </a:r>
-          </a:p>
-        </p:txBody>
-      </p:sp>
-      <p:sp>
-        <p:nvSpPr>
-          <p:cNvPr id="4" name="Rounded Rectangle 3"/>
-          <p:cNvSpPr/>
-          <p:nvPr/>
-        </p:nvSpPr>
-        <p:spPr>
-          <a:xfrm>
-            <a:off x="612648" y="1389888"/>
-            <a:ext cx="2514600" cy="3090672"/>
-          </a:xfrm>
-          <a:prstGeom prst="roundRect">
-            <a:avLst>
-              <a:gd name="adj" fmla="val 5500"/>
-            </a:avLst>
-          </a:prstGeom>
-          <a:solidFill>
-            <a:srgbClr val="F5F5F5"/>
-          </a:solidFill>
-          <a:ln>
-            <a:noFill/>
-          </a:ln>
-          <a:effectLst/>
-        </p:spPr>
-        <p:style>
-          <a:lnRef idx="1">
-            <a:schemeClr val="accent1"/>
-          </a:lnRef>
-          <a:fillRef idx="3">
-            <a:schemeClr val="accent1"/>
-          </a:fillRef>
-          <a:effectRef idx="2">
-            <a:schemeClr val="accent1"/>
-          </a:effectRef>
-          <a:fontRef idx="minor">
-            <a:schemeClr val="lt1"/>
-          </a:fontRef>
-        </p:style>
-        <p:txBody>
-          <a:bodyPr rtlCol="0" anchor="ctr"/>
-          <a:lstStyle/>
-          <a:p>
-            <a:pPr algn="ctr"/>
-          </a:p>
-        </p:txBody>
-      </p:sp>
-      <p:sp>
-        <p:nvSpPr>
-          <p:cNvPr id="5" name="Oval 4"/>
-          <p:cNvSpPr/>
-          <p:nvPr/>
-        </p:nvSpPr>
-        <p:spPr>
-          <a:xfrm>
-            <a:off x="740664" y="1517904"/>
-            <a:ext cx="274320" cy="274320"/>
-          </a:xfrm>
-          <a:prstGeom prst="ellipse">
-            <a:avLst/>
-          </a:prstGeom>
-          <a:solidFill>
-            <a:srgbClr val="00B388"/>
-          </a:solidFill>
-          <a:ln>
-            <a:noFill/>
-          </a:ln>
-          <a:effectLst/>
-        </p:spPr>
-        <p:style>
-          <a:lnRef idx="1">
-            <a:schemeClr val="accent1"/>
-          </a:lnRef>
-          <a:fillRef idx="3">
-            <a:schemeClr val="accent1"/>
-          </a:fillRef>
-          <a:effectRef idx="2">
-            <a:schemeClr val="accent1"/>
-          </a:effectRef>
-          <a:fontRef idx="minor">
-            <a:schemeClr val="lt1"/>
-          </a:fontRef>
-        </p:style>
-        <p:txBody>
-          <a:bodyPr rtlCol="0" anchor="ctr" lIns="0" rIns="0" tIns="0" bIns="0"/>
-          <a:lstStyle/>
-          <a:p>
-            <a:pPr algn="ctr"/>
-            <a:r>
-              <a:rPr sz="900">
-                <a:solidFill>
-                  <a:srgbClr val="FFFFFF"/>
-                </a:solidFill>
-                <a:latin typeface="AvenirNext LT Pro Medium"/>
-              </a:rPr>
-              <a:t>01</a:t>
-            </a:r>
-          </a:p>
-        </p:txBody>
-      </p:sp>
-      <p:sp>
-        <p:nvSpPr>
-          <p:cNvPr id="6" name="TextBox 5"/>
-          <p:cNvSpPr txBox="1"/>
-          <p:nvPr/>
-        </p:nvSpPr>
-        <p:spPr>
-          <a:xfrm>
-            <a:off x="1124712" y="1554480"/>
-            <a:ext cx="1856232" cy="228600"/>
-          </a:xfrm>
-          <a:prstGeom prst="rect">
-            <a:avLst/>
-          </a:prstGeom>
-          <a:noFill/>
-        </p:spPr>
-        <p:txBody>
-          <a:bodyPr wrap="square" anchor="t" lIns="0" rIns="0" tIns="0" bIns="0">
-            <a:spAutoFit/>
-          </a:bodyPr>
-          <a:lstStyle/>
-          <a:p>
-            <a:pPr algn="l">
-              <a:lnSpc>
-                <a:spcPct val="120000"/>
-              </a:lnSpc>
-            </a:pPr>
-            <a:r>
-              <a:rPr sz="1000">
-                <a:solidFill>
-                  <a:srgbClr val="191919"/>
-                </a:solidFill>
-                <a:latin typeface="AvenirNext LT Pro Medium"/>
-              </a:rPr>
-              <a:t>Export control</a:t>
-            </a:r>
-          </a:p>
-        </p:txBody>
-      </p:sp>
-      <p:sp>
-        <p:nvSpPr>
-          <p:cNvPr id="7" name="TextBox 6"/>
-          <p:cNvSpPr txBox="1"/>
-          <p:nvPr/>
-        </p:nvSpPr>
-        <p:spPr>
-          <a:xfrm>
-            <a:off x="740664" y="1956816"/>
-            <a:ext cx="2240280" cy="1417320"/>
-          </a:xfrm>
-          <a:prstGeom prst="rect">
-            <a:avLst/>
-          </a:prstGeom>
-          <a:noFill/>
-        </p:spPr>
-        <p:txBody>
-          <a:bodyPr wrap="square" anchor="t" lIns="0" rIns="0" tIns="0" bIns="0">
-            <a:spAutoFit/>
-          </a:bodyPr>
-          <a:lstStyle/>
-          <a:p>
-            <a:pPr algn="l">
-              <a:lnSpc>
-                <a:spcPct val="118000"/>
-              </a:lnSpc>
-            </a:pPr>
-            <a:r>
-              <a:rPr sz="720">
-                <a:solidFill>
-                  <a:srgbClr val="191919"/>
-                </a:solidFill>
-                <a:latin typeface="Outfit"/>
-              </a:rPr>
-              <a:t>MBE growth equipment is a listed strategic commodity — a Hong Kong import licence (3B001(a)(3)) is required whatever the origin. US-origin parts additionally need a BIS licence, since the US has treated HK as mainland China since Dec 2020, and approval is not assured.</a:t>
-            </a:r>
-          </a:p>
-        </p:txBody>
-      </p:sp>
-      <p:sp>
-        <p:nvSpPr>
-          <p:cNvPr id="8" name="TextBox 7"/>
-          <p:cNvSpPr txBox="1"/>
-          <p:nvPr/>
-        </p:nvSpPr>
-        <p:spPr>
-          <a:xfrm>
-            <a:off x="740664" y="3438144"/>
-            <a:ext cx="2240280" cy="164592"/>
-          </a:xfrm>
-          <a:prstGeom prst="rect">
-            <a:avLst/>
-          </a:prstGeom>
-          <a:noFill/>
-        </p:spPr>
-        <p:txBody>
-          <a:bodyPr wrap="square" anchor="t" lIns="0" rIns="0" tIns="0" bIns="0">
-            <a:spAutoFit/>
-          </a:bodyPr>
-          <a:lstStyle/>
-          <a:p>
-            <a:pPr algn="l">
-              <a:lnSpc>
-                <a:spcPct val="120000"/>
-              </a:lnSpc>
-            </a:pPr>
-            <a:r>
               <a:rPr sz="700" spc="60">
                 <a:solidFill>
                   <a:srgbClr val="00B388"/>
@@ -25116,516 +24818,6 @@
       </p:sp>
       <p:sp>
         <p:nvSpPr>
-          <p:cNvPr id="9" name="TextBox 8"/>
-          <p:cNvSpPr txBox="1"/>
-          <p:nvPr/>
-        </p:nvSpPr>
-        <p:spPr>
-          <a:xfrm>
-            <a:off x="740664" y="3639312"/>
-            <a:ext cx="2240280" cy="777240"/>
-          </a:xfrm>
-          <a:prstGeom prst="rect">
-            <a:avLst/>
-          </a:prstGeom>
-          <a:noFill/>
-        </p:spPr>
-        <p:txBody>
-          <a:bodyPr wrap="square" anchor="t" lIns="0" rIns="0" tIns="0" bIns="0">
-            <a:spAutoFit/>
-          </a:bodyPr>
-          <a:lstStyle/>
-          <a:p>
-            <a:pPr algn="l">
-              <a:lnSpc>
-                <a:spcPct val="118000"/>
-              </a:lnSpc>
-            </a:pPr>
-            <a:r>
-              <a:rPr sz="700">
-                <a:solidFill>
-                  <a:srgbClr val="666666"/>
-                </a:solidFill>
-                <a:latin typeface="Outfit"/>
-              </a:rPr>
-              <a:t>classify every candidate part's ECCN before any PO; prefer EU sources (Riber, MBE-Komponenten, STAIB) or domestic builders as fallback; licence path confirmed = go / no-go gate P0</a:t>
-            </a:r>
-          </a:p>
-        </p:txBody>
-      </p:sp>
-      <p:sp>
-        <p:nvSpPr>
-          <p:cNvPr id="10" name="Rounded Rectangle 9"/>
-          <p:cNvSpPr/>
-          <p:nvPr/>
-        </p:nvSpPr>
-        <p:spPr>
-          <a:xfrm>
-            <a:off x="3310128" y="1389888"/>
-            <a:ext cx="2514600" cy="3090672"/>
-          </a:xfrm>
-          <a:prstGeom prst="roundRect">
-            <a:avLst>
-              <a:gd name="adj" fmla="val 5500"/>
-            </a:avLst>
-          </a:prstGeom>
-          <a:solidFill>
-            <a:srgbClr val="F5F5F5"/>
-          </a:solidFill>
-          <a:ln>
-            <a:noFill/>
-          </a:ln>
-          <a:effectLst/>
-        </p:spPr>
-        <p:style>
-          <a:lnRef idx="1">
-            <a:schemeClr val="accent1"/>
-          </a:lnRef>
-          <a:fillRef idx="3">
-            <a:schemeClr val="accent1"/>
-          </a:fillRef>
-          <a:effectRef idx="2">
-            <a:schemeClr val="accent1"/>
-          </a:effectRef>
-          <a:fontRef idx="minor">
-            <a:schemeClr val="lt1"/>
-          </a:fontRef>
-        </p:style>
-        <p:txBody>
-          <a:bodyPr rtlCol="0" anchor="ctr"/>
-          <a:lstStyle/>
-          <a:p>
-            <a:pPr algn="ctr"/>
-          </a:p>
-        </p:txBody>
-      </p:sp>
-      <p:sp>
-        <p:nvSpPr>
-          <p:cNvPr id="11" name="Oval 10"/>
-          <p:cNvSpPr/>
-          <p:nvPr/>
-        </p:nvSpPr>
-        <p:spPr>
-          <a:xfrm>
-            <a:off x="3438144" y="1517904"/>
-            <a:ext cx="274320" cy="274320"/>
-          </a:xfrm>
-          <a:prstGeom prst="ellipse">
-            <a:avLst/>
-          </a:prstGeom>
-          <a:solidFill>
-            <a:srgbClr val="00B388"/>
-          </a:solidFill>
-          <a:ln>
-            <a:noFill/>
-          </a:ln>
-          <a:effectLst/>
-        </p:spPr>
-        <p:style>
-          <a:lnRef idx="1">
-            <a:schemeClr val="accent1"/>
-          </a:lnRef>
-          <a:fillRef idx="3">
-            <a:schemeClr val="accent1"/>
-          </a:fillRef>
-          <a:effectRef idx="2">
-            <a:schemeClr val="accent1"/>
-          </a:effectRef>
-          <a:fontRef idx="minor">
-            <a:schemeClr val="lt1"/>
-          </a:fontRef>
-        </p:style>
-        <p:txBody>
-          <a:bodyPr rtlCol="0" anchor="ctr" lIns="0" rIns="0" tIns="0" bIns="0"/>
-          <a:lstStyle/>
-          <a:p>
-            <a:pPr algn="ctr"/>
-            <a:r>
-              <a:rPr sz="900">
-                <a:solidFill>
-                  <a:srgbClr val="FFFFFF"/>
-                </a:solidFill>
-                <a:latin typeface="AvenirNext LT Pro Medium"/>
-              </a:rPr>
-              <a:t>02</a:t>
-            </a:r>
-          </a:p>
-        </p:txBody>
-      </p:sp>
-      <p:sp>
-        <p:nvSpPr>
-          <p:cNvPr id="12" name="TextBox 11"/>
-          <p:cNvSpPr txBox="1"/>
-          <p:nvPr/>
-        </p:nvSpPr>
-        <p:spPr>
-          <a:xfrm>
-            <a:off x="3822191" y="1554480"/>
-            <a:ext cx="1856232" cy="228600"/>
-          </a:xfrm>
-          <a:prstGeom prst="rect">
-            <a:avLst/>
-          </a:prstGeom>
-          <a:noFill/>
-        </p:spPr>
-        <p:txBody>
-          <a:bodyPr wrap="square" anchor="t" lIns="0" rIns="0" tIns="0" bIns="0">
-            <a:spAutoFit/>
-          </a:bodyPr>
-          <a:lstStyle/>
-          <a:p>
-            <a:pPr algn="l">
-              <a:lnSpc>
-                <a:spcPct val="120000"/>
-              </a:lnSpc>
-            </a:pPr>
-            <a:r>
-              <a:rPr sz="1000">
-                <a:solidFill>
-                  <a:srgbClr val="191919"/>
-                </a:solidFill>
-                <a:latin typeface="AvenirNext LT Pro Medium"/>
-              </a:rPr>
-              <a:t>Temperature spec</a:t>
-            </a:r>
-          </a:p>
-        </p:txBody>
-      </p:sp>
-      <p:sp>
-        <p:nvSpPr>
-          <p:cNvPr id="13" name="TextBox 12"/>
-          <p:cNvSpPr txBox="1"/>
-          <p:nvPr/>
-        </p:nvSpPr>
-        <p:spPr>
-          <a:xfrm>
-            <a:off x="3438144" y="1956816"/>
-            <a:ext cx="2240280" cy="1417320"/>
-          </a:xfrm>
-          <a:prstGeom prst="rect">
-            <a:avLst/>
-          </a:prstGeom>
-          <a:noFill/>
-        </p:spPr>
-        <p:txBody>
-          <a:bodyPr wrap="square" anchor="t" lIns="0" rIns="0" tIns="0" bIns="0">
-            <a:spAutoFit/>
-          </a:bodyPr>
-          <a:lstStyle/>
-          <a:p>
-            <a:pPr algn="l">
-              <a:lnSpc>
-                <a:spcPct val="118000"/>
-              </a:lnSpc>
-            </a:pPr>
-            <a:r>
-              <a:rPr sz="720">
-                <a:solidFill>
-                  <a:srgbClr val="191919"/>
-                </a:solidFill>
-                <a:latin typeface="Outfit"/>
-              </a:rPr>
-              <a:t>Selective-area growth only turns on above ~930–940 °C on-wafer, and AlN wants more. Used chassis come with ~900 °C GaAs manipulators — unusable — and retrofitting later means re-opening the chamber. Heater filaments also degrade in nitrogen plasma.</a:t>
-            </a:r>
-          </a:p>
-        </p:txBody>
-      </p:sp>
-      <p:sp>
-        <p:nvSpPr>
-          <p:cNvPr id="14" name="TextBox 13"/>
-          <p:cNvSpPr txBox="1"/>
-          <p:nvPr/>
-        </p:nvSpPr>
-        <p:spPr>
-          <a:xfrm>
-            <a:off x="3438144" y="3438144"/>
-            <a:ext cx="2240280" cy="164592"/>
-          </a:xfrm>
-          <a:prstGeom prst="rect">
-            <a:avLst/>
-          </a:prstGeom>
-          <a:noFill/>
-        </p:spPr>
-        <p:txBody>
-          <a:bodyPr wrap="square" anchor="t" lIns="0" rIns="0" tIns="0" bIns="0">
-            <a:spAutoFit/>
-          </a:bodyPr>
-          <a:lstStyle/>
-          <a:p>
-            <a:pPr algn="l">
-              <a:lnSpc>
-                <a:spcPct val="120000"/>
-              </a:lnSpc>
-            </a:pPr>
-            <a:r>
-              <a:rPr sz="700" spc="60">
-                <a:solidFill>
-                  <a:srgbClr val="00B388"/>
-                </a:solidFill>
-                <a:latin typeface="AvenirNext LT Pro Medium"/>
-              </a:rPr>
-              <a:t>MITIGATION</a:t>
-            </a:r>
-          </a:p>
-        </p:txBody>
-      </p:sp>
-      <p:sp>
-        <p:nvSpPr>
-          <p:cNvPr id="15" name="TextBox 14"/>
-          <p:cNvSpPr txBox="1"/>
-          <p:nvPr/>
-        </p:nvSpPr>
-        <p:spPr>
-          <a:xfrm>
-            <a:off x="3438144" y="3639312"/>
-            <a:ext cx="2240280" cy="777240"/>
-          </a:xfrm>
-          <a:prstGeom prst="rect">
-            <a:avLst/>
-          </a:prstGeom>
-          <a:noFill/>
-        </p:spPr>
-        <p:txBody>
-          <a:bodyPr wrap="square" anchor="t" lIns="0" rIns="0" tIns="0" bIns="0">
-            <a:spAutoFit/>
-          </a:bodyPr>
-          <a:lstStyle/>
-          <a:p>
-            <a:pPr algn="l">
-              <a:lnSpc>
-                <a:spcPct val="118000"/>
-              </a:lnSpc>
-            </a:pPr>
-            <a:r>
-              <a:rPr sz="700">
-                <a:solidFill>
-                  <a:srgbClr val="666666"/>
-                </a:solidFill>
-                <a:latin typeface="Outfit"/>
-              </a:rPr>
-              <a:t>order the 1200 °C manipulator as the first long-lead item; specify a W or PBN/PG heater for the N-plasma environment; treat filaments as consumables and stock spares</a:t>
-            </a:r>
-          </a:p>
-        </p:txBody>
-      </p:sp>
-      <p:sp>
-        <p:nvSpPr>
-          <p:cNvPr id="16" name="Rounded Rectangle 15"/>
-          <p:cNvSpPr/>
-          <p:nvPr/>
-        </p:nvSpPr>
-        <p:spPr>
-          <a:xfrm>
-            <a:off x="6007608" y="1389888"/>
-            <a:ext cx="2514600" cy="3090672"/>
-          </a:xfrm>
-          <a:prstGeom prst="roundRect">
-            <a:avLst>
-              <a:gd name="adj" fmla="val 5500"/>
-            </a:avLst>
-          </a:prstGeom>
-          <a:solidFill>
-            <a:srgbClr val="F5F5F5"/>
-          </a:solidFill>
-          <a:ln>
-            <a:noFill/>
-          </a:ln>
-          <a:effectLst/>
-        </p:spPr>
-        <p:style>
-          <a:lnRef idx="1">
-            <a:schemeClr val="accent1"/>
-          </a:lnRef>
-          <a:fillRef idx="3">
-            <a:schemeClr val="accent1"/>
-          </a:fillRef>
-          <a:effectRef idx="2">
-            <a:schemeClr val="accent1"/>
-          </a:effectRef>
-          <a:fontRef idx="minor">
-            <a:schemeClr val="lt1"/>
-          </a:fontRef>
-        </p:style>
-        <p:txBody>
-          <a:bodyPr rtlCol="0" anchor="ctr"/>
-          <a:lstStyle/>
-          <a:p>
-            <a:pPr algn="ctr"/>
-          </a:p>
-        </p:txBody>
-      </p:sp>
-      <p:sp>
-        <p:nvSpPr>
-          <p:cNvPr id="17" name="Oval 16"/>
-          <p:cNvSpPr/>
-          <p:nvPr/>
-        </p:nvSpPr>
-        <p:spPr>
-          <a:xfrm>
-            <a:off x="6135624" y="1517904"/>
-            <a:ext cx="274320" cy="274320"/>
-          </a:xfrm>
-          <a:prstGeom prst="ellipse">
-            <a:avLst/>
-          </a:prstGeom>
-          <a:solidFill>
-            <a:srgbClr val="00B388"/>
-          </a:solidFill>
-          <a:ln>
-            <a:noFill/>
-          </a:ln>
-          <a:effectLst/>
-        </p:spPr>
-        <p:style>
-          <a:lnRef idx="1">
-            <a:schemeClr val="accent1"/>
-          </a:lnRef>
-          <a:fillRef idx="3">
-            <a:schemeClr val="accent1"/>
-          </a:fillRef>
-          <a:effectRef idx="2">
-            <a:schemeClr val="accent1"/>
-          </a:effectRef>
-          <a:fontRef idx="minor">
-            <a:schemeClr val="lt1"/>
-          </a:fontRef>
-        </p:style>
-        <p:txBody>
-          <a:bodyPr rtlCol="0" anchor="ctr" lIns="0" rIns="0" tIns="0" bIns="0"/>
-          <a:lstStyle/>
-          <a:p>
-            <a:pPr algn="ctr"/>
-            <a:r>
-              <a:rPr sz="900">
-                <a:solidFill>
-                  <a:srgbClr val="FFFFFF"/>
-                </a:solidFill>
-                <a:latin typeface="AvenirNext LT Pro Medium"/>
-              </a:rPr>
-              <a:t>03</a:t>
-            </a:r>
-          </a:p>
-        </p:txBody>
-      </p:sp>
-      <p:sp>
-        <p:nvSpPr>
-          <p:cNvPr id="18" name="TextBox 17"/>
-          <p:cNvSpPr txBox="1"/>
-          <p:nvPr/>
-        </p:nvSpPr>
-        <p:spPr>
-          <a:xfrm>
-            <a:off x="6519672" y="1554480"/>
-            <a:ext cx="1856232" cy="228600"/>
-          </a:xfrm>
-          <a:prstGeom prst="rect">
-            <a:avLst/>
-          </a:prstGeom>
-          <a:noFill/>
-        </p:spPr>
-        <p:txBody>
-          <a:bodyPr wrap="square" anchor="t" lIns="0" rIns="0" tIns="0" bIns="0">
-            <a:spAutoFit/>
-          </a:bodyPr>
-          <a:lstStyle/>
-          <a:p>
-            <a:pPr algn="l">
-              <a:lnSpc>
-                <a:spcPct val="120000"/>
-              </a:lnSpc>
-            </a:pPr>
-            <a:r>
-              <a:rPr sz="1000">
-                <a:solidFill>
-                  <a:srgbClr val="191919"/>
-                </a:solidFill>
-                <a:latin typeface="AvenirNext LT Pro Medium"/>
-              </a:rPr>
-              <a:t>N₂ gas load</a:t>
-            </a:r>
-          </a:p>
-        </p:txBody>
-      </p:sp>
-      <p:sp>
-        <p:nvSpPr>
-          <p:cNvPr id="19" name="TextBox 18"/>
-          <p:cNvSpPr txBox="1"/>
-          <p:nvPr/>
-        </p:nvSpPr>
-        <p:spPr>
-          <a:xfrm>
-            <a:off x="6135624" y="1956816"/>
-            <a:ext cx="2240280" cy="1417320"/>
-          </a:xfrm>
-          <a:prstGeom prst="rect">
-            <a:avLst/>
-          </a:prstGeom>
-          <a:noFill/>
-        </p:spPr>
-        <p:txBody>
-          <a:bodyPr wrap="square" anchor="t" lIns="0" rIns="0" tIns="0" bIns="0">
-            <a:spAutoFit/>
-          </a:bodyPr>
-          <a:lstStyle/>
-          <a:p>
-            <a:pPr algn="l">
-              <a:lnSpc>
-                <a:spcPct val="118000"/>
-              </a:lnSpc>
-            </a:pPr>
-            <a:r>
-              <a:rPr sz="720">
-                <a:solidFill>
-                  <a:srgbClr val="191919"/>
-                </a:solidFill>
-                <a:latin typeface="Outfit"/>
-              </a:rPr>
-              <a:t>Nitride growth runs at ~10⁻⁵ Torr of continuous N₂. Ion pumps saturate and cryopumps need constant regeneration at this load — a mis-sized vacuum stack is usually discovered only at first plasma, after the rebuild is finished.</a:t>
-            </a:r>
-          </a:p>
-        </p:txBody>
-      </p:sp>
-      <p:sp>
-        <p:nvSpPr>
-          <p:cNvPr id="20" name="TextBox 19"/>
-          <p:cNvSpPr txBox="1"/>
-          <p:nvPr/>
-        </p:nvSpPr>
-        <p:spPr>
-          <a:xfrm>
-            <a:off x="6135624" y="3438144"/>
-            <a:ext cx="2240280" cy="164592"/>
-          </a:xfrm>
-          <a:prstGeom prst="rect">
-            <a:avLst/>
-          </a:prstGeom>
-          <a:noFill/>
-        </p:spPr>
-        <p:txBody>
-          <a:bodyPr wrap="square" anchor="t" lIns="0" rIns="0" tIns="0" bIns="0">
-            <a:spAutoFit/>
-          </a:bodyPr>
-          <a:lstStyle/>
-          <a:p>
-            <a:pPr algn="l">
-              <a:lnSpc>
-                <a:spcPct val="120000"/>
-              </a:lnSpc>
-            </a:pPr>
-            <a:r>
-              <a:rPr sz="700" spc="60">
-                <a:solidFill>
-                  <a:srgbClr val="00B388"/>
-                </a:solidFill>
-                <a:latin typeface="AvenirNext LT Pro Medium"/>
-              </a:rPr>
-              <a:t>MITIGATION</a:t>
-            </a:r>
-          </a:p>
-        </p:txBody>
-      </p:sp>
-      <p:sp>
-        <p:nvSpPr>
           <p:cNvPr id="21" name="TextBox 20"/>
           <p:cNvSpPr txBox="1"/>
           <p:nvPr/>
@@ -25641,7 +24833,7 @@
           <a:noFill/>
         </p:spPr>
         <p:txBody>
-          <a:bodyPr wrap="square" anchor="t" lIns="0" rIns="0" tIns="0" bIns="0">
+          <a:bodyPr wrap="square" lIns="0" tIns="0" rIns="0" bIns="0" anchor="t">
             <a:spAutoFit/>
           </a:bodyPr>
           <a:lstStyle/>
@@ -26503,6 +25695,33 @@
 </file>
 
 <file path=customXml/item1.xml><?xml version="1.0" encoding="utf-8"?>
+<p:properties xmlns:p="http://schemas.microsoft.com/office/2006/metadata/properties" xmlns:xsi="http://www.w3.org/2001/XMLSchema-instance" xmlns:pc="http://schemas.microsoft.com/office/infopath/2007/PartnerControls">
+  <documentManagement>
+    <Owner xmlns="ec86daf3-54cc-4371-8b45-255dbc846304" xsi:nil="true"/>
+    <TaxCatchAll xmlns="0fc404c9-74b8-4235-a9fc-590446d087ba" xsi:nil="true"/>
+    <lcf76f155ced4ddcb4097134ff3c332f xmlns="ec86daf3-54cc-4371-8b45-255dbc846304">
+      <Terms xmlns="http://schemas.microsoft.com/office/infopath/2007/PartnerControls"/>
+    </lcf76f155ced4ddcb4097134ff3c332f>
+    <Keyword xmlns="ec86daf3-54cc-4371-8b45-255dbc846304" xsi:nil="true"/>
+    <Summary xmlns="ec86daf3-54cc-4371-8b45-255dbc846304" xsi:nil="true"/>
+    <Status xmlns="ec86daf3-54cc-4371-8b45-255dbc846304" xsi:nil="true"/>
+    <EffectiveDate xmlns="ec86daf3-54cc-4371-8b45-255dbc846304">2026-03-24T01:53:06+00:00</EffectiveDate>
+    <Catgory xmlns="ec86daf3-54cc-4371-8b45-255dbc846304">SOP</Catgory>
+    <Department xmlns="ec86daf3-54cc-4371-8b45-255dbc846304" xsi:nil="true"/>
+  </documentManagement>
+</p:properties>
+</file>
+
+<file path=customXml/item2.xml><?xml version="1.0" encoding="utf-8"?>
+<?mso-contentType ?>
+<FormTemplates xmlns="http://schemas.microsoft.com/sharepoint/v3/contenttype/forms">
+  <Display>DocumentLibraryForm</Display>
+  <Edit>DocumentLibraryForm</Edit>
+  <New>DocumentLibraryForm</New>
+</FormTemplates>
+</file>
+
+<file path=customXml/item3.xml><?xml version="1.0" encoding="utf-8"?>
 <ct:contentTypeSchema xmlns:ct="http://schemas.microsoft.com/office/2006/metadata/contentType" xmlns:ma="http://schemas.microsoft.com/office/2006/metadata/properties/metaAttributes" ct:_="" ma:_="" ma:contentTypeName="Document" ma:contentTypeID="0x010100036E4847BD80E241AD671FD9ED4F6360" ma:contentTypeVersion="21" ma:contentTypeDescription="Create a new document." ma:contentTypeScope="" ma:versionID="4069c741a583665eed84be1efd03745f">
   <xsd:schema xmlns:xsd="http://www.w3.org/2001/XMLSchema" xmlns:xs="http://www.w3.org/2001/XMLSchema" xmlns:p="http://schemas.microsoft.com/office/2006/metadata/properties" xmlns:ns2="ec86daf3-54cc-4371-8b45-255dbc846304" xmlns:ns3="0fc404c9-74b8-4235-a9fc-590446d087ba" targetNamespace="http://schemas.microsoft.com/office/2006/metadata/properties" ma:root="true" ma:fieldsID="8b66d103d2bd64bb270579f4551d1277" ns2:_="" ns3:_="">
     <xsd:import namespace="ec86daf3-54cc-4371-8b45-255dbc846304"/>
@@ -26769,34 +25988,26 @@
 </ct:contentTypeSchema>
 </file>
 
-<file path=customXml/item2.xml><?xml version="1.0" encoding="utf-8"?>
-<?mso-contentType ?>
-<FormTemplates xmlns="http://schemas.microsoft.com/sharepoint/v3/contenttype/forms">
-  <Display>DocumentLibraryForm</Display>
-  <Edit>DocumentLibraryForm</Edit>
-  <New>DocumentLibraryForm</New>
-</FormTemplates>
+<file path=customXml/itemProps1.xml><?xml version="1.0" encoding="utf-8"?>
+<ds:datastoreItem xmlns:ds="http://schemas.openxmlformats.org/officeDocument/2006/customXml" ds:itemID="{FA497A0E-6993-4E56-A42E-040A48550A3E}">
+  <ds:schemaRefs>
+    <ds:schemaRef ds:uri="http://schemas.microsoft.com/office/2006/metadata/properties"/>
+    <ds:schemaRef ds:uri="http://schemas.microsoft.com/office/infopath/2007/PartnerControls"/>
+    <ds:schemaRef ds:uri="ec86daf3-54cc-4371-8b45-255dbc846304"/>
+    <ds:schemaRef ds:uri="0fc404c9-74b8-4235-a9fc-590446d087ba"/>
+  </ds:schemaRefs>
+</ds:datastoreItem>
 </file>
 
-<file path=customXml/item3.xml><?xml version="1.0" encoding="utf-8"?>
-<p:properties xmlns:p="http://schemas.microsoft.com/office/2006/metadata/properties" xmlns:xsi="http://www.w3.org/2001/XMLSchema-instance" xmlns:pc="http://schemas.microsoft.com/office/infopath/2007/PartnerControls">
-  <documentManagement>
-    <Owner xmlns="ec86daf3-54cc-4371-8b45-255dbc846304" xsi:nil="true"/>
-    <TaxCatchAll xmlns="0fc404c9-74b8-4235-a9fc-590446d087ba" xsi:nil="true"/>
-    <lcf76f155ced4ddcb4097134ff3c332f xmlns="ec86daf3-54cc-4371-8b45-255dbc846304">
-      <Terms xmlns="http://schemas.microsoft.com/office/infopath/2007/PartnerControls"/>
-    </lcf76f155ced4ddcb4097134ff3c332f>
-    <Keyword xmlns="ec86daf3-54cc-4371-8b45-255dbc846304" xsi:nil="true"/>
-    <Summary xmlns="ec86daf3-54cc-4371-8b45-255dbc846304" xsi:nil="true"/>
-    <Status xmlns="ec86daf3-54cc-4371-8b45-255dbc846304" xsi:nil="true"/>
-    <EffectiveDate xmlns="ec86daf3-54cc-4371-8b45-255dbc846304">2026-03-24T01:53:06+00:00</EffectiveDate>
-    <Catgory xmlns="ec86daf3-54cc-4371-8b45-255dbc846304">SOP</Catgory>
-    <Department xmlns="ec86daf3-54cc-4371-8b45-255dbc846304" xsi:nil="true"/>
-  </documentManagement>
-</p:properties>
+<file path=customXml/itemProps2.xml><?xml version="1.0" encoding="utf-8"?>
+<ds:datastoreItem xmlns:ds="http://schemas.openxmlformats.org/officeDocument/2006/customXml" ds:itemID="{7A05AFF7-81B7-43EE-9E05-64E740D99DEB}">
+  <ds:schemaRefs>
+    <ds:schemaRef ds:uri="http://schemas.microsoft.com/sharepoint/v3/contenttype/forms"/>
+  </ds:schemaRefs>
+</ds:datastoreItem>
 </file>
 
-<file path=customXml/itemProps1.xml><?xml version="1.0" encoding="utf-8"?>
+<file path=customXml/itemProps3.xml><?xml version="1.0" encoding="utf-8"?>
 <ds:datastoreItem xmlns:ds="http://schemas.openxmlformats.org/officeDocument/2006/customXml" ds:itemID="{E389C391-BB32-4D60-9AA4-E046AA36D869}">
   <ds:schemaRefs>
     <ds:schemaRef ds:uri="http://schemas.microsoft.com/office/2006/metadata/contentType"/>
@@ -26813,23 +26024,4 @@
     <ds:schemaRef ds:uri="http://schemas.microsoft.com/internal/obd"/>
   </ds:schemaRefs>
 </ds:datastoreItem>
-</file>
-
-<file path=customXml/itemProps2.xml><?xml version="1.0" encoding="utf-8"?>
-<ds:datastoreItem xmlns:ds="http://schemas.openxmlformats.org/officeDocument/2006/customXml" ds:itemID="{7A05AFF7-81B7-43EE-9E05-64E740D99DEB}">
-  <ds:schemaRefs>
-    <ds:schemaRef ds:uri="http://schemas.microsoft.com/sharepoint/v3/contenttype/forms"/>
-  </ds:schemaRefs>
-</ds:datastoreItem>
-</file>
-
-<file path=customXml/itemProps3.xml><?xml version="1.0" encoding="utf-8"?>
-<ds:datastoreItem xmlns:ds="http://schemas.openxmlformats.org/officeDocument/2006/customXml" ds:itemID="{FA497A0E-6993-4E56-A42E-040A48550A3E}">
-  <ds:schemaRefs>
-    <ds:schemaRef ds:uri="http://schemas.microsoft.com/office/2006/metadata/properties"/>
-    <ds:schemaRef ds:uri="http://schemas.microsoft.com/office/infopath/2007/PartnerControls"/>
-    <ds:schemaRef ds:uri="ec86daf3-54cc-4371-8b45-255dbc846304"/>
-    <ds:schemaRef ds:uri="0fc404c9-74b8-4235-a9fc-590446d087ba"/>
-  </ds:schemaRefs>
-</ds:datastoreItem>
 </file>